--- a/8_Full_Presentation.pptx
+++ b/8_Full_Presentation.pptx
@@ -119,6 +119,11 @@
       </a:defRPr>
     </a:lvl9pPr>
   </p:defaultTextStyle>
+  <p:extLst>
+    <p:ext uri="{EFAFB233-063F-42B5-8137-9DF3F51BA10A}">
+      <p15:sldGuideLst xmlns:p15="http://schemas.microsoft.com/office/powerpoint/2012/main"/>
+    </p:ext>
+  </p:extLst>
 </p:presentation>
 </file>
 
@@ -3470,7 +3475,7 @@
               </a:lnSpc>
             </a:pPr>
             <a:r>
-              <a:rPr lang="en-US" sz="2800" b="1" noProof="1">
+              <a:rPr lang="en-US" sz="2600" b="1" noProof="1">
                 <a:solidFill>
                   <a:srgbClr val="172526"/>
                 </a:solidFill>
@@ -3480,7 +3485,7 @@
               <a:t>Ручной контроль конденсата создаёт два источника потерь:</a:t>
             </a:r>
             <a:r>
-              <a:rPr lang="ru-RU" sz="2800" b="1" noProof="1">
+              <a:rPr lang="ru-RU" sz="2600" b="1" noProof="1">
                 <a:solidFill>
                   <a:srgbClr val="172526"/>
                 </a:solidFill>
@@ -3490,7 +3495,7 @@
               <a:t> </a:t>
             </a:r>
             <a:r>
-              <a:rPr lang="en-US" sz="2800" b="1" noProof="1">
+              <a:rPr lang="en-US" sz="2600" b="1" noProof="1">
                 <a:solidFill>
                   <a:srgbClr val="172526"/>
                 </a:solidFill>
@@ -3499,7 +3504,7 @@
               </a:rPr>
               <a:t>простои линии и возвраты продукции</a:t>
             </a:r>
-            <a:endParaRPr lang="en-US" sz="2800" noProof="1"/>
+            <a:endParaRPr lang="en-US" sz="2600" noProof="1"/>
           </a:p>
         </p:txBody>
       </p:sp>
@@ -3616,7 +3621,7 @@
           <p:nvPr>
             <p:extLst>
               <p:ext uri="{F5677B7D-0D2A-4D9B-9A5C-6D8D7D0E5A5D}">
-                <pptd:line xmlns="" xmlns:a14="http://schemas.microsoft.com/office/drawing/2010/main" xmlns:c="http://schemas.openxmlformats.org/drawingml/2006/chart" xmlns:cx="http://schemas.microsoft.com/office/drawing/2014/chartex" xmlns:m="http://schemas.openxmlformats.org/officeDocument/2006/math" xmlns:mc="http://schemas.openxmlformats.org/markup-compatibility/2006" xmlns:pptd="https://kimi-design.msh.team/pptd/2026" encoding="base64url">eyJ2aWV3Qm94IjpbMSw0N10sInBvaW50cyI6IjAsMCAwLDQ3In0</pptd:line>
+                <pptd:line xmlns:pptd="https://kimi-design.msh.team/pptd/2026" xmlns:mc="http://schemas.openxmlformats.org/markup-compatibility/2006" xmlns:m="http://schemas.openxmlformats.org/officeDocument/2006/math" xmlns:cx="http://schemas.microsoft.com/office/drawing/2014/chartex" xmlns:c="http://schemas.openxmlformats.org/drawingml/2006/chart" xmlns:a14="http://schemas.microsoft.com/office/drawing/2010/main" xmlns="" encoding="base64url">eyJ2aWV3Qm94IjpbMSw0N10sInBvaW50cyI6IjAsMCAwLDQ3In0</pptd:line>
               </p:ext>
             </p:extLst>
           </p:nvPr>
@@ -3743,7 +3748,7 @@
           <p:nvPr>
             <p:extLst>
               <p:ext uri="{F5677B7D-0D2A-4D9B-9A5C-6D8D7D0E5A5D}">
-                <pptd:line xmlns="" xmlns:a14="http://schemas.microsoft.com/office/drawing/2010/main" xmlns:c="http://schemas.openxmlformats.org/drawingml/2006/chart" xmlns:cx="http://schemas.microsoft.com/office/drawing/2014/chartex" xmlns:m="http://schemas.openxmlformats.org/officeDocument/2006/math" xmlns:mc="http://schemas.openxmlformats.org/markup-compatibility/2006" xmlns:pptd="https://kimi-design.msh.team/pptd/2026" encoding="base64url">eyJ2aWV3Qm94IjpbMSw0N10sInBvaW50cyI6IjAsMCAwLDQ3In0</pptd:line>
+                <pptd:line xmlns:pptd="https://kimi-design.msh.team/pptd/2026" xmlns:mc="http://schemas.openxmlformats.org/markup-compatibility/2006" xmlns:m="http://schemas.openxmlformats.org/officeDocument/2006/math" xmlns:cx="http://schemas.microsoft.com/office/drawing/2014/chartex" xmlns:c="http://schemas.openxmlformats.org/drawingml/2006/chart" xmlns:a14="http://schemas.microsoft.com/office/drawing/2010/main" xmlns="" encoding="base64url">eyJ2aWV3Qm94IjpbMSw0N10sInBvaW50cyI6IjAsMCAwLDQ3In0</pptd:line>
               </p:ext>
             </p:extLst>
           </p:nvPr>
@@ -3870,7 +3875,7 @@
           <p:nvPr>
             <p:extLst>
               <p:ext uri="{F5677B7D-0D2A-4D9B-9A5C-6D8D7D0E5A5D}">
-                <pptd:line xmlns="" xmlns:a14="http://schemas.microsoft.com/office/drawing/2010/main" xmlns:c="http://schemas.openxmlformats.org/drawingml/2006/chart" xmlns:cx="http://schemas.microsoft.com/office/drawing/2014/chartex" xmlns:m="http://schemas.openxmlformats.org/officeDocument/2006/math" xmlns:mc="http://schemas.openxmlformats.org/markup-compatibility/2006" xmlns:pptd="https://kimi-design.msh.team/pptd/2026" encoding="base64url">eyJ2aWV3Qm94IjpbMSw0N10sInBvaW50cyI6IjAsMCAwLDQ3In0</pptd:line>
+                <pptd:line xmlns:pptd="https://kimi-design.msh.team/pptd/2026" xmlns:mc="http://schemas.openxmlformats.org/markup-compatibility/2006" xmlns:m="http://schemas.openxmlformats.org/officeDocument/2006/math" xmlns:cx="http://schemas.microsoft.com/office/drawing/2014/chartex" xmlns:c="http://schemas.openxmlformats.org/drawingml/2006/chart" xmlns:a14="http://schemas.microsoft.com/office/drawing/2010/main" xmlns="" encoding="base64url">eyJ2aWV3Qm94IjpbMSw0N10sInBvaW50cyI6IjAsMCAwLDQ3In0</pptd:line>
               </p:ext>
             </p:extLst>
           </p:nvPr>
@@ -3997,7 +4002,7 @@
           <p:nvPr>
             <p:extLst>
               <p:ext uri="{F5677B7D-0D2A-4D9B-9A5C-6D8D7D0E5A5D}">
-                <pptd:line xmlns="" xmlns:a14="http://schemas.microsoft.com/office/drawing/2010/main" xmlns:c="http://schemas.openxmlformats.org/drawingml/2006/chart" xmlns:cx="http://schemas.microsoft.com/office/drawing/2014/chartex" xmlns:m="http://schemas.openxmlformats.org/officeDocument/2006/math" xmlns:mc="http://schemas.openxmlformats.org/markup-compatibility/2006" xmlns:pptd="https://kimi-design.msh.team/pptd/2026" encoding="base64url">eyJ2aWV3Qm94IjpbNzcwLDFdLCJwb2ludHMiOiIwLDAgNzcwLDAifQ</pptd:line>
+                <pptd:line xmlns:pptd="https://kimi-design.msh.team/pptd/2026" xmlns:mc="http://schemas.openxmlformats.org/markup-compatibility/2006" xmlns:m="http://schemas.openxmlformats.org/officeDocument/2006/math" xmlns:cx="http://schemas.microsoft.com/office/drawing/2014/chartex" xmlns:c="http://schemas.openxmlformats.org/drawingml/2006/chart" xmlns:a14="http://schemas.microsoft.com/office/drawing/2010/main" xmlns="" encoding="base64url">eyJ2aWV3Qm94IjpbNzcwLDFdLCJwb2ludHMiOiIwLDAgNzcwLDAifQ</pptd:line>
               </p:ext>
             </p:extLst>
           </p:nvPr>
@@ -4041,7 +4046,7 @@
           <p:nvPr>
             <p:extLst>
               <p:ext uri="{F5677B7D-0D2A-4D9B-9A5C-6D8D7D0E5A5D}">
-                <pptd:icon xmlns="" xmlns:a14="http://schemas.microsoft.com/office/drawing/2010/main" xmlns:c="http://schemas.openxmlformats.org/drawingml/2006/chart" xmlns:cx="http://schemas.microsoft.com/office/drawing/2014/chartex" xmlns:m="http://schemas.openxmlformats.org/officeDocument/2006/math" xmlns:mc="http://schemas.openxmlformats.org/markup-compatibility/2006" xmlns:pptd="https://kimi-design.msh.team/pptd/2026" encoding="base64url">eyJpY29uTmFtZSI6ImZhczppbmR1c3RyeSJ9</pptd:icon>
+                <pptd:icon xmlns:pptd="https://kimi-design.msh.team/pptd/2026" xmlns:mc="http://schemas.openxmlformats.org/markup-compatibility/2006" xmlns:m="http://schemas.openxmlformats.org/officeDocument/2006/math" xmlns:cx="http://schemas.microsoft.com/office/drawing/2014/chartex" xmlns:c="http://schemas.openxmlformats.org/drawingml/2006/chart" xmlns:a14="http://schemas.microsoft.com/office/drawing/2010/main" xmlns="" encoding="base64url">eyJpY29uTmFtZSI6ImZhczppbmR1c3RyeSJ9</pptd:icon>
               </p:ext>
             </p:extLst>
           </p:nvPr>
@@ -4195,7 +4200,7 @@
           <p:nvPr>
             <p:extLst>
               <p:ext uri="{F5677B7D-0D2A-4D9B-9A5C-6D8D7D0E5A5D}">
-                <pptd:icon xmlns="" xmlns:a14="http://schemas.microsoft.com/office/drawing/2010/main" xmlns:c="http://schemas.openxmlformats.org/drawingml/2006/chart" xmlns:cx="http://schemas.microsoft.com/office/drawing/2014/chartex" xmlns:m="http://schemas.openxmlformats.org/officeDocument/2006/math" xmlns:mc="http://schemas.openxmlformats.org/markup-compatibility/2006" xmlns:pptd="https://kimi-design.msh.team/pptd/2026" encoding="base64url">eyJpY29uTmFtZSI6ImZhczpib3gtb3BlbiJ9</pptd:icon>
+                <pptd:icon xmlns:pptd="https://kimi-design.msh.team/pptd/2026" xmlns:mc="http://schemas.openxmlformats.org/markup-compatibility/2006" xmlns:m="http://schemas.openxmlformats.org/officeDocument/2006/math" xmlns:cx="http://schemas.microsoft.com/office/drawing/2014/chartex" xmlns:c="http://schemas.openxmlformats.org/drawingml/2006/chart" xmlns:a14="http://schemas.microsoft.com/office/drawing/2010/main" xmlns="" encoding="base64url">eyJpY29uTmFtZSI6ImZhczpib3gtb3BlbiJ9</pptd:icon>
               </p:ext>
             </p:extLst>
           </p:nvPr>
@@ -4399,7 +4404,7 @@
           <p:nvPr>
             <p:extLst>
               <p:ext uri="{F5677B7D-0D2A-4D9B-9A5C-6D8D7D0E5A5D}">
-                <pptd:icon xmlns="" xmlns:a14="http://schemas.microsoft.com/office/drawing/2010/main" xmlns:c="http://schemas.openxmlformats.org/drawingml/2006/chart" xmlns:cx="http://schemas.microsoft.com/office/drawing/2014/chartex" xmlns:m="http://schemas.openxmlformats.org/officeDocument/2006/math" xmlns:mc="http://schemas.openxmlformats.org/markup-compatibility/2006" xmlns:pptd="https://kimi-design.msh.team/pptd/2026" encoding="base64url">eyJpY29uTmFtZSI6ImZhczp0cnVjayJ9</pptd:icon>
+                <pptd:icon xmlns:pptd="https://kimi-design.msh.team/pptd/2026" xmlns:mc="http://schemas.openxmlformats.org/markup-compatibility/2006" xmlns:m="http://schemas.openxmlformats.org/officeDocument/2006/math" xmlns:cx="http://schemas.microsoft.com/office/drawing/2014/chartex" xmlns:c="http://schemas.openxmlformats.org/drawingml/2006/chart" xmlns:a14="http://schemas.microsoft.com/office/drawing/2010/main" xmlns="" encoding="base64url">eyJpY29uTmFtZSI6ImZhczp0cnVjayJ9</pptd:icon>
               </p:ext>
             </p:extLst>
           </p:nvPr>
@@ -4985,7 +4990,7 @@
           <p:nvPr>
             <p:extLst>
               <p:ext uri="{F5677B7D-0D2A-4D9B-9A5C-6D8D7D0E5A5D}">
-                <pptd:line xmlns="" xmlns:a14="http://schemas.microsoft.com/office/drawing/2010/main" xmlns:c="http://schemas.openxmlformats.org/drawingml/2006/chart" xmlns:cx="http://schemas.microsoft.com/office/drawing/2014/chartex" xmlns:m="http://schemas.openxmlformats.org/officeDocument/2006/math" xmlns:mc="http://schemas.openxmlformats.org/markup-compatibility/2006" xmlns:pptd="https://kimi-design.msh.team/pptd/2026" encoding="base64url">eyJ2aWV3Qm94IjpbMSwxNTBdLCJwb2ludHMiOiIwLDAgMCwxNTAifQ</pptd:line>
+                <pptd:line xmlns:pptd="https://kimi-design.msh.team/pptd/2026" xmlns:mc="http://schemas.openxmlformats.org/markup-compatibility/2006" xmlns:m="http://schemas.openxmlformats.org/officeDocument/2006/math" xmlns:cx="http://schemas.microsoft.com/office/drawing/2014/chartex" xmlns:c="http://schemas.openxmlformats.org/drawingml/2006/chart" xmlns:a14="http://schemas.microsoft.com/office/drawing/2010/main" xmlns="" encoding="base64url">eyJ2aWV3Qm94IjpbMSwxNTBdLCJwb2ludHMiOiIwLDAgMCwxNTAifQ</pptd:line>
               </p:ext>
             </p:extLst>
           </p:nvPr>
@@ -5579,7 +5584,7 @@
               </a:lnSpc>
             </a:pPr>
             <a:r>
-              <a:rPr lang="en-US" sz="2800" b="1" noProof="1">
+              <a:rPr lang="en-US" sz="2600" b="1" noProof="1">
                 <a:solidFill>
                   <a:srgbClr val="172526"/>
                 </a:solidFill>
@@ -5589,7 +5594,7 @@
               <a:t>Выбираем YOLO-детекцию: находим и локализуем
 конденсат, не останавливая производственную линию</a:t>
             </a:r>
-            <a:endParaRPr lang="en-US" sz="2800" noProof="1"/>
+            <a:endParaRPr lang="en-US" sz="2600" noProof="1"/>
           </a:p>
         </p:txBody>
       </p:sp>
@@ -5682,7 +5687,7 @@
           <p:nvPr>
             <p:extLst>
               <p:ext uri="{F5677B7D-0D2A-4D9B-9A5C-6D8D7D0E5A5D}">
-                <pptd:line xmlns="" xmlns:a14="http://schemas.microsoft.com/office/drawing/2010/main" xmlns:c="http://schemas.openxmlformats.org/drawingml/2006/chart" xmlns:cx="http://schemas.microsoft.com/office/drawing/2014/chartex" xmlns:m="http://schemas.openxmlformats.org/officeDocument/2006/math" xmlns:mc="http://schemas.openxmlformats.org/markup-compatibility/2006" xmlns:pptd="https://kimi-design.msh.team/pptd/2026" encoding="base64url">eyJ2aWV3Qm94IjpbMSw0N10sInBvaW50cyI6IjAsMCAwLDQ3In0</pptd:line>
+                <pptd:line xmlns:pptd="https://kimi-design.msh.team/pptd/2026" xmlns:mc="http://schemas.openxmlformats.org/markup-compatibility/2006" xmlns:m="http://schemas.openxmlformats.org/officeDocument/2006/math" xmlns:cx="http://schemas.microsoft.com/office/drawing/2014/chartex" xmlns:c="http://schemas.openxmlformats.org/drawingml/2006/chart" xmlns:a14="http://schemas.microsoft.com/office/drawing/2010/main" xmlns="" encoding="base64url">eyJ2aWV3Qm94IjpbMSw0N10sInBvaW50cyI6IjAsMCAwLDQ3In0</pptd:line>
               </p:ext>
             </p:extLst>
           </p:nvPr>
@@ -5785,7 +5790,7 @@
           <p:nvPr>
             <p:extLst>
               <p:ext uri="{F5677B7D-0D2A-4D9B-9A5C-6D8D7D0E5A5D}">
-                <pptd:line xmlns="" xmlns:a14="http://schemas.microsoft.com/office/drawing/2010/main" xmlns:c="http://schemas.openxmlformats.org/drawingml/2006/chart" xmlns:cx="http://schemas.microsoft.com/office/drawing/2014/chartex" xmlns:m="http://schemas.openxmlformats.org/officeDocument/2006/math" xmlns:mc="http://schemas.openxmlformats.org/markup-compatibility/2006" xmlns:pptd="https://kimi-design.msh.team/pptd/2026" encoding="base64url">eyJ2aWV3Qm94IjpbMSw0N10sInBvaW50cyI6IjAsMCAwLDQ3In0</pptd:line>
+                <pptd:line xmlns:pptd="https://kimi-design.msh.team/pptd/2026" xmlns:mc="http://schemas.openxmlformats.org/markup-compatibility/2006" xmlns:m="http://schemas.openxmlformats.org/officeDocument/2006/math" xmlns:cx="http://schemas.microsoft.com/office/drawing/2014/chartex" xmlns:c="http://schemas.openxmlformats.org/drawingml/2006/chart" xmlns:a14="http://schemas.microsoft.com/office/drawing/2010/main" xmlns="" encoding="base64url">eyJ2aWV3Qm94IjpbMSw0N10sInBvaW50cyI6IjAsMCAwLDQ3In0</pptd:line>
               </p:ext>
             </p:extLst>
           </p:nvPr>
@@ -5888,7 +5893,7 @@
           <p:nvPr>
             <p:extLst>
               <p:ext uri="{F5677B7D-0D2A-4D9B-9A5C-6D8D7D0E5A5D}">
-                <pptd:line xmlns="" xmlns:a14="http://schemas.microsoft.com/office/drawing/2010/main" xmlns:c="http://schemas.openxmlformats.org/drawingml/2006/chart" xmlns:cx="http://schemas.microsoft.com/office/drawing/2014/chartex" xmlns:m="http://schemas.openxmlformats.org/officeDocument/2006/math" xmlns:mc="http://schemas.openxmlformats.org/markup-compatibility/2006" xmlns:pptd="https://kimi-design.msh.team/pptd/2026" encoding="base64url">eyJ2aWV3Qm94IjpbMSw0N10sInBvaW50cyI6IjAsMCAwLDQ3In0</pptd:line>
+                <pptd:line xmlns:pptd="https://kimi-design.msh.team/pptd/2026" xmlns:mc="http://schemas.openxmlformats.org/markup-compatibility/2006" xmlns:m="http://schemas.openxmlformats.org/officeDocument/2006/math" xmlns:cx="http://schemas.microsoft.com/office/drawing/2014/chartex" xmlns:c="http://schemas.openxmlformats.org/drawingml/2006/chart" xmlns:a14="http://schemas.microsoft.com/office/drawing/2010/main" xmlns="" encoding="base64url">eyJ2aWV3Qm94IjpbMSw0N10sInBvaW50cyI6IjAsMCAwLDQ3In0</pptd:line>
               </p:ext>
             </p:extLst>
           </p:nvPr>
@@ -6221,7 +6226,7 @@
           <p:nvPr>
             <p:extLst>
               <p:ext uri="{F5677B7D-0D2A-4D9B-9A5C-6D8D7D0E5A5D}">
-                <pptd:line xmlns="" xmlns:a14="http://schemas.microsoft.com/office/drawing/2010/main" xmlns:c="http://schemas.openxmlformats.org/drawingml/2006/chart" xmlns:cx="http://schemas.microsoft.com/office/drawing/2014/chartex" xmlns:m="http://schemas.openxmlformats.org/officeDocument/2006/math" xmlns:mc="http://schemas.openxmlformats.org/markup-compatibility/2006" xmlns:pptd="https://kimi-design.msh.team/pptd/2026" encoding="base64url">eyJ2aWV3Qm94IjpbMSwyNDZdLCJwb2ludHMiOiIwLDAgMCwyNDYifQ</pptd:line>
+                <pptd:line xmlns:pptd="https://kimi-design.msh.team/pptd/2026" xmlns:mc="http://schemas.openxmlformats.org/markup-compatibility/2006" xmlns:m="http://schemas.openxmlformats.org/officeDocument/2006/math" xmlns:cx="http://schemas.microsoft.com/office/drawing/2014/chartex" xmlns:c="http://schemas.openxmlformats.org/drawingml/2006/chart" xmlns:a14="http://schemas.microsoft.com/office/drawing/2010/main" xmlns="" encoding="base64url">eyJ2aWV3Qm94IjpbMSwyNDZdLCJwb2ludHMiOiIwLDAgMCwyNDYifQ</pptd:line>
               </p:ext>
             </p:extLst>
           </p:nvPr>
@@ -6783,7 +6788,7 @@
           <p:nvPr>
             <p:extLst>
               <p:ext uri="{F5677B7D-0D2A-4D9B-9A5C-6D8D7D0E5A5D}">
-                <pptd:icon xmlns="" xmlns:a14="http://schemas.microsoft.com/office/drawing/2010/main" xmlns:c="http://schemas.openxmlformats.org/drawingml/2006/chart" xmlns:cx="http://schemas.microsoft.com/office/drawing/2014/chartex" xmlns:m="http://schemas.openxmlformats.org/officeDocument/2006/math" xmlns:mc="http://schemas.openxmlformats.org/markup-compatibility/2006" xmlns:pptd="https://kimi-design.msh.team/pptd/2026" encoding="base64url">eyJpY29uTmFtZSI6ImZhczpjYW1lcmEifQ</pptd:icon>
+                <pptd:icon xmlns:pptd="https://kimi-design.msh.team/pptd/2026" xmlns:mc="http://schemas.openxmlformats.org/markup-compatibility/2006" xmlns:m="http://schemas.openxmlformats.org/officeDocument/2006/math" xmlns:cx="http://schemas.microsoft.com/office/drawing/2014/chartex" xmlns:c="http://schemas.openxmlformats.org/drawingml/2006/chart" xmlns:a14="http://schemas.microsoft.com/office/drawing/2010/main" xmlns="" encoding="base64url">eyJpY29uTmFtZSI6ImZhczpjYW1lcmEifQ</pptd:icon>
               </p:ext>
             </p:extLst>
           </p:nvPr>
@@ -6985,7 +6990,7 @@
           <p:nvPr>
             <p:extLst>
               <p:ext uri="{F5677B7D-0D2A-4D9B-9A5C-6D8D7D0E5A5D}">
-                <pptd:line xmlns="" xmlns:a14="http://schemas.microsoft.com/office/drawing/2010/main" xmlns:c="http://schemas.openxmlformats.org/drawingml/2006/chart" xmlns:cx="http://schemas.microsoft.com/office/drawing/2014/chartex" xmlns:m="http://schemas.openxmlformats.org/officeDocument/2006/math" xmlns:mc="http://schemas.openxmlformats.org/markup-compatibility/2006" xmlns:pptd="https://kimi-design.msh.team/pptd/2026" encoding="base64url">eyJ2aWV3Qm94IjpbNDAsMV0sInBvaW50cyI6IjAsMCA0MCwwIn0</pptd:line>
+                <pptd:line xmlns:pptd="https://kimi-design.msh.team/pptd/2026" xmlns:mc="http://schemas.openxmlformats.org/markup-compatibility/2006" xmlns:m="http://schemas.openxmlformats.org/officeDocument/2006/math" xmlns:cx="http://schemas.microsoft.com/office/drawing/2014/chartex" xmlns:c="http://schemas.openxmlformats.org/drawingml/2006/chart" xmlns:a14="http://schemas.microsoft.com/office/drawing/2010/main" xmlns="" encoding="base64url">eyJ2aWV3Qm94IjpbNDAsMV0sInBvaW50cyI6IjAsMCA0MCwwIn0</pptd:line>
               </p:ext>
             </p:extLst>
           </p:nvPr>
@@ -7029,7 +7034,7 @@
           <p:nvPr>
             <p:extLst>
               <p:ext uri="{F5677B7D-0D2A-4D9B-9A5C-6D8D7D0E5A5D}">
-                <pptd:icon xmlns="" xmlns:a14="http://schemas.microsoft.com/office/drawing/2010/main" xmlns:c="http://schemas.openxmlformats.org/drawingml/2006/chart" xmlns:cx="http://schemas.microsoft.com/office/drawing/2014/chartex" xmlns:m="http://schemas.openxmlformats.org/officeDocument/2006/math" xmlns:mc="http://schemas.openxmlformats.org/markup-compatibility/2006" xmlns:pptd="https://kimi-design.msh.team/pptd/2026" encoding="base64url">eyJpY29uTmFtZSI6ImZhczptaWNyb2NoaXAifQ</pptd:icon>
+                <pptd:icon xmlns:pptd="https://kimi-design.msh.team/pptd/2026" xmlns:mc="http://schemas.openxmlformats.org/markup-compatibility/2006" xmlns:m="http://schemas.openxmlformats.org/officeDocument/2006/math" xmlns:cx="http://schemas.microsoft.com/office/drawing/2014/chartex" xmlns:c="http://schemas.openxmlformats.org/drawingml/2006/chart" xmlns:a14="http://schemas.microsoft.com/office/drawing/2010/main" xmlns="" encoding="base64url">eyJpY29uTmFtZSI6ImZhczptaWNyb2NoaXAifQ</pptd:icon>
               </p:ext>
             </p:extLst>
           </p:nvPr>
@@ -7443,7 +7448,7 @@
           <p:nvPr>
             <p:extLst>
               <p:ext uri="{F5677B7D-0D2A-4D9B-9A5C-6D8D7D0E5A5D}">
-                <pptd:line xmlns="" xmlns:a14="http://schemas.microsoft.com/office/drawing/2010/main" xmlns:c="http://schemas.openxmlformats.org/drawingml/2006/chart" xmlns:cx="http://schemas.microsoft.com/office/drawing/2014/chartex" xmlns:m="http://schemas.openxmlformats.org/officeDocument/2006/math" xmlns:mc="http://schemas.openxmlformats.org/markup-compatibility/2006" xmlns:pptd="https://kimi-design.msh.team/pptd/2026" encoding="base64url">eyJ2aWV3Qm94IjpbNDAsMV0sInBvaW50cyI6IjAsMCA0MCwwIn0</pptd:line>
+                <pptd:line xmlns:pptd="https://kimi-design.msh.team/pptd/2026" xmlns:mc="http://schemas.openxmlformats.org/markup-compatibility/2006" xmlns:m="http://schemas.openxmlformats.org/officeDocument/2006/math" xmlns:cx="http://schemas.microsoft.com/office/drawing/2014/chartex" xmlns:c="http://schemas.openxmlformats.org/drawingml/2006/chart" xmlns:a14="http://schemas.microsoft.com/office/drawing/2010/main" xmlns="" encoding="base64url">eyJ2aWV3Qm94IjpbNDAsMV0sInBvaW50cyI6IjAsMCA0MCwwIn0</pptd:line>
               </p:ext>
             </p:extLst>
           </p:nvPr>
@@ -7487,7 +7492,7 @@
           <p:nvPr>
             <p:extLst>
               <p:ext uri="{F5677B7D-0D2A-4D9B-9A5C-6D8D7D0E5A5D}">
-                <pptd:icon xmlns="" xmlns:a14="http://schemas.microsoft.com/office/drawing/2010/main" xmlns:c="http://schemas.openxmlformats.org/drawingml/2006/chart" xmlns:cx="http://schemas.microsoft.com/office/drawing/2014/chartex" xmlns:m="http://schemas.openxmlformats.org/officeDocument/2006/math" xmlns:mc="http://schemas.openxmlformats.org/markup-compatibility/2006" xmlns:pptd="https://kimi-design.msh.team/pptd/2026" encoding="base64url">eyJpY29uTmFtZSI6ImZhczpkaXNwbGF5In0</pptd:icon>
+                <pptd:icon xmlns:pptd="https://kimi-design.msh.team/pptd/2026" xmlns:mc="http://schemas.openxmlformats.org/markup-compatibility/2006" xmlns:m="http://schemas.openxmlformats.org/officeDocument/2006/math" xmlns:cx="http://schemas.microsoft.com/office/drawing/2014/chartex" xmlns:c="http://schemas.openxmlformats.org/drawingml/2006/chart" xmlns:a14="http://schemas.microsoft.com/office/drawing/2010/main" xmlns="" encoding="base64url">eyJpY29uTmFtZSI6ImZhczpkaXNwbGF5In0</pptd:icon>
               </p:ext>
             </p:extLst>
           </p:nvPr>
@@ -7697,7 +7702,7 @@
           <p:nvPr>
             <p:extLst>
               <p:ext uri="{F5677B7D-0D2A-4D9B-9A5C-6D8D7D0E5A5D}">
-                <pptd:line xmlns="" xmlns:a14="http://schemas.microsoft.com/office/drawing/2010/main" xmlns:c="http://schemas.openxmlformats.org/drawingml/2006/chart" xmlns:cx="http://schemas.microsoft.com/office/drawing/2014/chartex" xmlns:m="http://schemas.openxmlformats.org/officeDocument/2006/math" xmlns:mc="http://schemas.openxmlformats.org/markup-compatibility/2006" xmlns:pptd="https://kimi-design.msh.team/pptd/2026" encoding="base64url">eyJ2aWV3Qm94IjpbNDAsMV0sInBvaW50cyI6IjAsMCA0MCwwIn0</pptd:line>
+                <pptd:line xmlns:pptd="https://kimi-design.msh.team/pptd/2026" xmlns:mc="http://schemas.openxmlformats.org/markup-compatibility/2006" xmlns:m="http://schemas.openxmlformats.org/officeDocument/2006/math" xmlns:cx="http://schemas.microsoft.com/office/drawing/2014/chartex" xmlns:c="http://schemas.openxmlformats.org/drawingml/2006/chart" xmlns:a14="http://schemas.microsoft.com/office/drawing/2010/main" xmlns="" encoding="base64url">eyJ2aWV3Qm94IjpbNDAsMV0sInBvaW50cyI6IjAsMCA0MCwwIn0</pptd:line>
               </p:ext>
             </p:extLst>
           </p:nvPr>
@@ -7741,7 +7746,7 @@
           <p:nvPr>
             <p:extLst>
               <p:ext uri="{F5677B7D-0D2A-4D9B-9A5C-6D8D7D0E5A5D}">
-                <pptd:icon xmlns="" xmlns:a14="http://schemas.microsoft.com/office/drawing/2010/main" xmlns:c="http://schemas.openxmlformats.org/drawingml/2006/chart" xmlns:cx="http://schemas.microsoft.com/office/drawing/2014/chartex" xmlns:m="http://schemas.openxmlformats.org/officeDocument/2006/math" xmlns:mc="http://schemas.openxmlformats.org/markup-compatibility/2006" xmlns:pptd="https://kimi-design.msh.team/pptd/2026" encoding="base64url">eyJpY29uTmFtZSI6ImZhczpnZWFycyJ9</pptd:icon>
+                <pptd:icon xmlns:pptd="https://kimi-design.msh.team/pptd/2026" xmlns:mc="http://schemas.openxmlformats.org/markup-compatibility/2006" xmlns:m="http://schemas.openxmlformats.org/officeDocument/2006/math" xmlns:cx="http://schemas.microsoft.com/office/drawing/2014/chartex" xmlns:c="http://schemas.openxmlformats.org/drawingml/2006/chart" xmlns:a14="http://schemas.microsoft.com/office/drawing/2010/main" xmlns="" encoding="base64url">eyJpY29uTmFtZSI6ImZhczpnZWFycyJ9</pptd:icon>
               </p:ext>
             </p:extLst>
           </p:nvPr>
@@ -8227,7 +8232,7 @@
           <p:nvPr>
             <p:extLst>
               <p:ext uri="{F5677B7D-0D2A-4D9B-9A5C-6D8D7D0E5A5D}">
-                <pptd:line xmlns="" xmlns:a14="http://schemas.microsoft.com/office/drawing/2010/main" xmlns:c="http://schemas.openxmlformats.org/drawingml/2006/chart" xmlns:cx="http://schemas.microsoft.com/office/drawing/2014/chartex" xmlns:m="http://schemas.openxmlformats.org/officeDocument/2006/math" xmlns:mc="http://schemas.openxmlformats.org/markup-compatibility/2006" xmlns:pptd="https://kimi-design.msh.team/pptd/2026" encoding="base64url">eyJ2aWV3Qm94IjpbODY0LDFdLCJwb2ludHMiOiIwLDAgODY0LDAifQ</pptd:line>
+                <pptd:line xmlns:pptd="https://kimi-design.msh.team/pptd/2026" xmlns:mc="http://schemas.openxmlformats.org/markup-compatibility/2006" xmlns:m="http://schemas.openxmlformats.org/officeDocument/2006/math" xmlns:cx="http://schemas.microsoft.com/office/drawing/2014/chartex" xmlns:c="http://schemas.openxmlformats.org/drawingml/2006/chart" xmlns:a14="http://schemas.microsoft.com/office/drawing/2010/main" xmlns="" encoding="base64url">eyJ2aWV3Qm94IjpbODY0LDFdLCJwb2ludHMiOiIwLDAgODY0LDAifQ</pptd:line>
               </p:ext>
             </p:extLst>
           </p:nvPr>
@@ -8408,7 +8413,7 @@
           <p:nvPr>
             <p:extLst>
               <p:ext uri="{F5677B7D-0D2A-4D9B-9A5C-6D8D7D0E5A5D}">
-                <pptd:line xmlns="" xmlns:a14="http://schemas.microsoft.com/office/drawing/2010/main" xmlns:c="http://schemas.openxmlformats.org/drawingml/2006/chart" xmlns:cx="http://schemas.microsoft.com/office/drawing/2014/chartex" xmlns:m="http://schemas.openxmlformats.org/officeDocument/2006/math" xmlns:mc="http://schemas.openxmlformats.org/markup-compatibility/2006" xmlns:pptd="https://kimi-design.msh.team/pptd/2026" encoding="base64url">eyJ2aWV3Qm94IjpbMSwxMTRdLCJwb2ludHMiOiIwLDAgMCwxMTQifQ</pptd:line>
+                <pptd:line xmlns:pptd="https://kimi-design.msh.team/pptd/2026" xmlns:mc="http://schemas.openxmlformats.org/markup-compatibility/2006" xmlns:m="http://schemas.openxmlformats.org/officeDocument/2006/math" xmlns:cx="http://schemas.microsoft.com/office/drawing/2014/chartex" xmlns:c="http://schemas.openxmlformats.org/drawingml/2006/chart" xmlns:a14="http://schemas.microsoft.com/office/drawing/2010/main" xmlns="" encoding="base64url">eyJ2aWV3Qm94IjpbMSwxMTRdLCJwb2ludHMiOiIwLDAgMCwxMTQifQ</pptd:line>
               </p:ext>
             </p:extLst>
           </p:nvPr>
@@ -8868,7 +8873,7 @@
               </a:lnSpc>
             </a:pPr>
             <a:r>
-              <a:rPr lang="en-US" sz="2800" b="1" noProof="1">
+              <a:rPr lang="en-US" sz="2600" b="1" noProof="1">
                 <a:solidFill>
                   <a:srgbClr val="172526"/>
                 </a:solidFill>
@@ -8878,7 +8883,7 @@
               <a:t>Пропуск дефекта обычно дороже лишней отбраковки,
 поэтому приоритет - не выпустить конденсат в магазин</a:t>
             </a:r>
-            <a:endParaRPr lang="en-US" sz="2800" noProof="1"/>
+            <a:endParaRPr lang="en-US" sz="2600" noProof="1"/>
           </a:p>
         </p:txBody>
       </p:sp>
@@ -9099,7 +9104,7 @@
           <p:nvPr>
             <p:extLst>
               <p:ext uri="{F5677B7D-0D2A-4D9B-9A5C-6D8D7D0E5A5D}">
-                <pptd:line xmlns="" xmlns:a14="http://schemas.microsoft.com/office/drawing/2010/main" xmlns:c="http://schemas.openxmlformats.org/drawingml/2006/chart" xmlns:cx="http://schemas.microsoft.com/office/drawing/2014/chartex" xmlns:m="http://schemas.openxmlformats.org/officeDocument/2006/math" xmlns:mc="http://schemas.openxmlformats.org/markup-compatibility/2006" xmlns:pptd="https://kimi-design.msh.team/pptd/2026" encoding="base64url">eyJ2aWV3Qm94IjpbMSwxOTBdLCJwb2ludHMiOiIwLDAgMCwxOTAifQ</pptd:line>
+                <pptd:line xmlns:pptd="https://kimi-design.msh.team/pptd/2026" xmlns:mc="http://schemas.openxmlformats.org/markup-compatibility/2006" xmlns:m="http://schemas.openxmlformats.org/officeDocument/2006/math" xmlns:cx="http://schemas.microsoft.com/office/drawing/2014/chartex" xmlns:c="http://schemas.openxmlformats.org/drawingml/2006/chart" xmlns:a14="http://schemas.microsoft.com/office/drawing/2010/main" xmlns="" encoding="base64url">eyJ2aWV3Qm94IjpbMSwxOTBdLCJwb2ludHMiOiIwLDAgMCwxOTAifQ</pptd:line>
               </p:ext>
             </p:extLst>
           </p:nvPr>
@@ -10410,7 +10415,7 @@
           <p:nvPr>
             <p:extLst>
               <p:ext uri="{F5677B7D-0D2A-4D9B-9A5C-6D8D7D0E5A5D}">
-                <pptd:line xmlns="" xmlns:a14="http://schemas.microsoft.com/office/drawing/2010/main" xmlns:c="http://schemas.openxmlformats.org/drawingml/2006/chart" xmlns:cx="http://schemas.microsoft.com/office/drawing/2014/chartex" xmlns:m="http://schemas.openxmlformats.org/officeDocument/2006/math" xmlns:mc="http://schemas.openxmlformats.org/markup-compatibility/2006" xmlns:pptd="https://kimi-design.msh.team/pptd/2026" encoding="base64url">eyJ2aWV3Qm94IjpbODY0LDFdLCJwb2ludHMiOiIwLDAgODY0LDAifQ</pptd:line>
+                <pptd:line xmlns:pptd="https://kimi-design.msh.team/pptd/2026" xmlns:mc="http://schemas.openxmlformats.org/markup-compatibility/2006" xmlns:m="http://schemas.openxmlformats.org/officeDocument/2006/math" xmlns:cx="http://schemas.microsoft.com/office/drawing/2014/chartex" xmlns:c="http://schemas.openxmlformats.org/drawingml/2006/chart" xmlns:a14="http://schemas.microsoft.com/office/drawing/2010/main" xmlns="" encoding="base64url">eyJ2aWV3Qm94IjpbODY0LDFdLCJwb2ludHMiOiIwLDAgODY0LDAifQ</pptd:line>
               </p:ext>
             </p:extLst>
           </p:nvPr>
@@ -10591,7 +10596,7 @@
           <p:nvPr>
             <p:extLst>
               <p:ext uri="{F5677B7D-0D2A-4D9B-9A5C-6D8D7D0E5A5D}">
-                <pptd:line xmlns="" xmlns:a14="http://schemas.microsoft.com/office/drawing/2010/main" xmlns:c="http://schemas.openxmlformats.org/drawingml/2006/chart" xmlns:cx="http://schemas.microsoft.com/office/drawing/2014/chartex" xmlns:m="http://schemas.openxmlformats.org/officeDocument/2006/math" xmlns:mc="http://schemas.openxmlformats.org/markup-compatibility/2006" xmlns:pptd="https://kimi-design.msh.team/pptd/2026" encoding="base64url">eyJ2aWV3Qm94IjpbMSwxMzRdLCJwb2ludHMiOiIwLDAgMCwxMzQifQ</pptd:line>
+                <pptd:line xmlns:pptd="https://kimi-design.msh.team/pptd/2026" xmlns:mc="http://schemas.openxmlformats.org/markup-compatibility/2006" xmlns:m="http://schemas.openxmlformats.org/officeDocument/2006/math" xmlns:cx="http://schemas.microsoft.com/office/drawing/2014/chartex" xmlns:c="http://schemas.openxmlformats.org/drawingml/2006/chart" xmlns:a14="http://schemas.microsoft.com/office/drawing/2010/main" xmlns="" encoding="base64url">eyJ2aWV3Qm94IjpbMSwxMzRdLCJwb2ludHMiOiIwLDAgMCwxMzQifQ</pptd:line>
               </p:ext>
             </p:extLst>
           </p:nvPr>
@@ -11244,7 +11249,7 @@
           <p:nvPr>
             <p:extLst>
               <p:ext uri="{F5677B7D-0D2A-4D9B-9A5C-6D8D7D0E5A5D}">
-                <pptd:line xmlns="" xmlns:a14="http://schemas.microsoft.com/office/drawing/2010/main" xmlns:c="http://schemas.openxmlformats.org/drawingml/2006/chart" xmlns:cx="http://schemas.microsoft.com/office/drawing/2014/chartex" xmlns:m="http://schemas.openxmlformats.org/officeDocument/2006/math" xmlns:mc="http://schemas.openxmlformats.org/markup-compatibility/2006" xmlns:pptd="https://kimi-design.msh.team/pptd/2026" encoding="base64url">eyJ2aWV3Qm94IjpbNTIwLDFdLCJwb2ludHMiOiIwLDAgNTIwLDAifQ</pptd:line>
+                <pptd:line xmlns:pptd="https://kimi-design.msh.team/pptd/2026" xmlns:mc="http://schemas.openxmlformats.org/markup-compatibility/2006" xmlns:m="http://schemas.openxmlformats.org/officeDocument/2006/math" xmlns:cx="http://schemas.microsoft.com/office/drawing/2014/chartex" xmlns:c="http://schemas.openxmlformats.org/drawingml/2006/chart" xmlns:a14="http://schemas.microsoft.com/office/drawing/2010/main" xmlns="" encoding="base64url">eyJ2aWV3Qm94IjpbNTIwLDFdLCJwb2ludHMiOiIwLDAgNTIwLDAifQ</pptd:line>
               </p:ext>
             </p:extLst>
           </p:nvPr>
@@ -11371,7 +11376,7 @@
           <p:nvPr>
             <p:extLst>
               <p:ext uri="{F5677B7D-0D2A-4D9B-9A5C-6D8D7D0E5A5D}">
-                <pptd:line xmlns="" xmlns:a14="http://schemas.microsoft.com/office/drawing/2010/main" xmlns:c="http://schemas.openxmlformats.org/drawingml/2006/chart" xmlns:cx="http://schemas.microsoft.com/office/drawing/2014/chartex" xmlns:m="http://schemas.openxmlformats.org/officeDocument/2006/math" xmlns:mc="http://schemas.openxmlformats.org/markup-compatibility/2006" xmlns:pptd="https://kimi-design.msh.team/pptd/2026" encoding="base64url">eyJ2aWV3Qm94IjpbNTIwLDFdLCJwb2ludHMiOiIwLDAgNTIwLDAifQ</pptd:line>
+                <pptd:line xmlns:pptd="https://kimi-design.msh.team/pptd/2026" xmlns:mc="http://schemas.openxmlformats.org/markup-compatibility/2006" xmlns:m="http://schemas.openxmlformats.org/officeDocument/2006/math" xmlns:cx="http://schemas.microsoft.com/office/drawing/2014/chartex" xmlns:c="http://schemas.openxmlformats.org/drawingml/2006/chart" xmlns:a14="http://schemas.microsoft.com/office/drawing/2010/main" xmlns="" encoding="base64url">eyJ2aWV3Qm94IjpbNTIwLDFdLCJwb2ludHMiOiIwLDAgNTIwLDAifQ</pptd:line>
               </p:ext>
             </p:extLst>
           </p:nvPr>
@@ -11498,7 +11503,7 @@
           <p:nvPr>
             <p:extLst>
               <p:ext uri="{F5677B7D-0D2A-4D9B-9A5C-6D8D7D0E5A5D}">
-                <pptd:line xmlns="" xmlns:a14="http://schemas.microsoft.com/office/drawing/2010/main" xmlns:c="http://schemas.openxmlformats.org/drawingml/2006/chart" xmlns:cx="http://schemas.microsoft.com/office/drawing/2014/chartex" xmlns:m="http://schemas.openxmlformats.org/officeDocument/2006/math" xmlns:mc="http://schemas.openxmlformats.org/markup-compatibility/2006" xmlns:pptd="https://kimi-design.msh.team/pptd/2026" encoding="base64url">eyJ2aWV3Qm94IjpbNTIwLDFdLCJwb2ludHMiOiIwLDAgNTIwLDAifQ</pptd:line>
+                <pptd:line xmlns:pptd="https://kimi-design.msh.team/pptd/2026" xmlns:mc="http://schemas.openxmlformats.org/markup-compatibility/2006" xmlns:m="http://schemas.openxmlformats.org/officeDocument/2006/math" xmlns:cx="http://schemas.microsoft.com/office/drawing/2014/chartex" xmlns:c="http://schemas.openxmlformats.org/drawingml/2006/chart" xmlns:a14="http://schemas.microsoft.com/office/drawing/2010/main" xmlns="" encoding="base64url">eyJ2aWV3Qm94IjpbNTIwLDFdLCJwb2ludHMiOiIwLDAgNTIwLDAifQ</pptd:line>
               </p:ext>
             </p:extLst>
           </p:nvPr>
@@ -11625,7 +11630,7 @@
           <p:nvPr>
             <p:extLst>
               <p:ext uri="{F5677B7D-0D2A-4D9B-9A5C-6D8D7D0E5A5D}">
-                <pptd:line xmlns="" xmlns:a14="http://schemas.microsoft.com/office/drawing/2010/main" xmlns:c="http://schemas.openxmlformats.org/drawingml/2006/chart" xmlns:cx="http://schemas.microsoft.com/office/drawing/2014/chartex" xmlns:m="http://schemas.openxmlformats.org/officeDocument/2006/math" xmlns:mc="http://schemas.openxmlformats.org/markup-compatibility/2006" xmlns:pptd="https://kimi-design.msh.team/pptd/2026" encoding="base64url">eyJ2aWV3Qm94IjpbNTIwLDFdLCJwb2ludHMiOiIwLDAgNTIwLDAifQ</pptd:line>
+                <pptd:line xmlns:pptd="https://kimi-design.msh.team/pptd/2026" xmlns:mc="http://schemas.openxmlformats.org/markup-compatibility/2006" xmlns:m="http://schemas.openxmlformats.org/officeDocument/2006/math" xmlns:cx="http://schemas.microsoft.com/office/drawing/2014/chartex" xmlns:c="http://schemas.openxmlformats.org/drawingml/2006/chart" xmlns:a14="http://schemas.microsoft.com/office/drawing/2010/main" xmlns="" encoding="base64url">eyJ2aWV3Qm94IjpbNTIwLDFdLCJwb2ludHMiOiIwLDAgNTIwLDAifQ</pptd:line>
               </p:ext>
             </p:extLst>
           </p:nvPr>
@@ -11752,7 +11757,7 @@
           <p:nvPr>
             <p:extLst>
               <p:ext uri="{F5677B7D-0D2A-4D9B-9A5C-6D8D7D0E5A5D}">
-                <pptd:line xmlns="" xmlns:a14="http://schemas.microsoft.com/office/drawing/2010/main" xmlns:c="http://schemas.openxmlformats.org/drawingml/2006/chart" xmlns:cx="http://schemas.microsoft.com/office/drawing/2014/chartex" xmlns:m="http://schemas.openxmlformats.org/officeDocument/2006/math" xmlns:mc="http://schemas.openxmlformats.org/markup-compatibility/2006" xmlns:pptd="https://kimi-design.msh.team/pptd/2026" encoding="base64url">eyJ2aWV3Qm94IjpbNTIwLDFdLCJwb2ludHMiOiIwLDAgNTIwLDAifQ</pptd:line>
+                <pptd:line xmlns:pptd="https://kimi-design.msh.team/pptd/2026" xmlns:mc="http://schemas.openxmlformats.org/markup-compatibility/2006" xmlns:m="http://schemas.openxmlformats.org/officeDocument/2006/math" xmlns:cx="http://schemas.microsoft.com/office/drawing/2014/chartex" xmlns:c="http://schemas.openxmlformats.org/drawingml/2006/chart" xmlns:a14="http://schemas.microsoft.com/office/drawing/2010/main" xmlns="" encoding="base64url">eyJ2aWV3Qm94IjpbNTIwLDFdLCJwb2ludHMiOiIwLDAgNTIwLDAifQ</pptd:line>
               </p:ext>
             </p:extLst>
           </p:nvPr>
@@ -11879,7 +11884,7 @@
           <p:nvPr>
             <p:extLst>
               <p:ext uri="{F5677B7D-0D2A-4D9B-9A5C-6D8D7D0E5A5D}">
-                <pptd:line xmlns="" xmlns:a14="http://schemas.microsoft.com/office/drawing/2010/main" xmlns:c="http://schemas.openxmlformats.org/drawingml/2006/chart" xmlns:cx="http://schemas.microsoft.com/office/drawing/2014/chartex" xmlns:m="http://schemas.openxmlformats.org/officeDocument/2006/math" xmlns:mc="http://schemas.openxmlformats.org/markup-compatibility/2006" xmlns:pptd="https://kimi-design.msh.team/pptd/2026" encoding="base64url">eyJ2aWV3Qm94IjpbNTIwLDFdLCJwb2ludHMiOiIwLDAgNTIwLDAifQ</pptd:line>
+                <pptd:line xmlns:pptd="https://kimi-design.msh.team/pptd/2026" xmlns:mc="http://schemas.openxmlformats.org/markup-compatibility/2006" xmlns:m="http://schemas.openxmlformats.org/officeDocument/2006/math" xmlns:cx="http://schemas.microsoft.com/office/drawing/2014/chartex" xmlns:c="http://schemas.openxmlformats.org/drawingml/2006/chart" xmlns:a14="http://schemas.microsoft.com/office/drawing/2010/main" xmlns="" encoding="base64url">eyJ2aWV3Qm94IjpbNTIwLDFdLCJwb2ludHMiOiIwLDAgNTIwLDAifQ</pptd:line>
               </p:ext>
             </p:extLst>
           </p:nvPr>
@@ -12006,7 +12011,7 @@
           <p:nvPr>
             <p:extLst>
               <p:ext uri="{F5677B7D-0D2A-4D9B-9A5C-6D8D7D0E5A5D}">
-                <pptd:line xmlns="" xmlns:a14="http://schemas.microsoft.com/office/drawing/2010/main" xmlns:c="http://schemas.openxmlformats.org/drawingml/2006/chart" xmlns:cx="http://schemas.microsoft.com/office/drawing/2014/chartex" xmlns:m="http://schemas.openxmlformats.org/officeDocument/2006/math" xmlns:mc="http://schemas.openxmlformats.org/markup-compatibility/2006" xmlns:pptd="https://kimi-design.msh.team/pptd/2026" encoding="base64url">eyJ2aWV3Qm94IjpbNTIwLDFdLCJwb2ludHMiOiIwLDAgNTIwLDAifQ</pptd:line>
+                <pptd:line xmlns:pptd="https://kimi-design.msh.team/pptd/2026" xmlns:mc="http://schemas.openxmlformats.org/markup-compatibility/2006" xmlns:m="http://schemas.openxmlformats.org/officeDocument/2006/math" xmlns:cx="http://schemas.microsoft.com/office/drawing/2014/chartex" xmlns:c="http://schemas.openxmlformats.org/drawingml/2006/chart" xmlns:a14="http://schemas.microsoft.com/office/drawing/2010/main" xmlns="" encoding="base64url">eyJ2aWV3Qm94IjpbNTIwLDFdLCJwb2ludHMiOiIwLDAgNTIwLDAifQ</pptd:line>
               </p:ext>
             </p:extLst>
           </p:nvPr>
@@ -12091,7 +12096,7 @@
           <p:nvPr>
             <p:extLst>
               <p:ext uri="{F5677B7D-0D2A-4D9B-9A5C-6D8D7D0E5A5D}">
-                <pptd:line xmlns="" xmlns:a14="http://schemas.microsoft.com/office/drawing/2010/main" xmlns:c="http://schemas.openxmlformats.org/drawingml/2006/chart" xmlns:cx="http://schemas.microsoft.com/office/drawing/2014/chartex" xmlns:m="http://schemas.openxmlformats.org/officeDocument/2006/math" xmlns:mc="http://schemas.openxmlformats.org/markup-compatibility/2006" xmlns:pptd="https://kimi-design.msh.team/pptd/2026" encoding="base64url">eyJ2aWV3Qm94IjpbMSwzMjldLCJwb2ludHMiOiIwLDAgMCwzMjkifQ</pptd:line>
+                <pptd:line xmlns:pptd="https://kimi-design.msh.team/pptd/2026" xmlns:mc="http://schemas.openxmlformats.org/markup-compatibility/2006" xmlns:m="http://schemas.openxmlformats.org/officeDocument/2006/math" xmlns:cx="http://schemas.microsoft.com/office/drawing/2014/chartex" xmlns:c="http://schemas.openxmlformats.org/drawingml/2006/chart" xmlns:a14="http://schemas.microsoft.com/office/drawing/2010/main" xmlns="" encoding="base64url">eyJ2aWV3Qm94IjpbMSwzMjldLCJwb2ludHMiOiIwLDAgMCwzMjkifQ</pptd:line>
               </p:ext>
             </p:extLst>
           </p:nvPr>
@@ -12742,7 +12747,7 @@
               </a:lnSpc>
             </a:pPr>
             <a:r>
-              <a:rPr lang="en-US" sz="2800" b="1" noProof="1">
+              <a:rPr lang="en-US" sz="2600" b="1" noProof="1">
                 <a:solidFill>
                   <a:srgbClr val="172526"/>
                 </a:solidFill>
@@ -12752,7 +12757,7 @@
               <a:t>Первая линия за 22-26 недель: оборудование,
 данные и модель готовим параллельно</a:t>
             </a:r>
-            <a:endParaRPr lang="en-US" sz="2800" noProof="1"/>
+            <a:endParaRPr lang="en-US" sz="2600" noProof="1"/>
           </a:p>
         </p:txBody>
       </p:sp>
@@ -12845,7 +12850,7 @@
           <p:nvPr>
             <p:extLst>
               <p:ext uri="{F5677B7D-0D2A-4D9B-9A5C-6D8D7D0E5A5D}">
-                <pptd:line xmlns="" xmlns:a14="http://schemas.microsoft.com/office/drawing/2010/main" xmlns:c="http://schemas.openxmlformats.org/drawingml/2006/chart" xmlns:cx="http://schemas.microsoft.com/office/drawing/2014/chartex" xmlns:m="http://schemas.openxmlformats.org/officeDocument/2006/math" xmlns:mc="http://schemas.openxmlformats.org/markup-compatibility/2006" xmlns:pptd="https://kimi-design.msh.team/pptd/2026" encoding="base64url">eyJ2aWV3Qm94IjpbMSw0N10sInBvaW50cyI6IjAsMCAwLDQ3In0</pptd:line>
+                <pptd:line xmlns:pptd="https://kimi-design.msh.team/pptd/2026" xmlns:mc="http://schemas.openxmlformats.org/markup-compatibility/2006" xmlns:m="http://schemas.openxmlformats.org/officeDocument/2006/math" xmlns:cx="http://schemas.microsoft.com/office/drawing/2014/chartex" xmlns:c="http://schemas.openxmlformats.org/drawingml/2006/chart" xmlns:a14="http://schemas.microsoft.com/office/drawing/2010/main" xmlns="" encoding="base64url">eyJ2aWV3Qm94IjpbMSw0N10sInBvaW50cyI6IjAsMCAwLDQ3In0</pptd:line>
               </p:ext>
             </p:extLst>
           </p:nvPr>
@@ -12948,7 +12953,7 @@
           <p:nvPr>
             <p:extLst>
               <p:ext uri="{F5677B7D-0D2A-4D9B-9A5C-6D8D7D0E5A5D}">
-                <pptd:line xmlns="" xmlns:a14="http://schemas.microsoft.com/office/drawing/2010/main" xmlns:c="http://schemas.openxmlformats.org/drawingml/2006/chart" xmlns:cx="http://schemas.microsoft.com/office/drawing/2014/chartex" xmlns:m="http://schemas.openxmlformats.org/officeDocument/2006/math" xmlns:mc="http://schemas.openxmlformats.org/markup-compatibility/2006" xmlns:pptd="https://kimi-design.msh.team/pptd/2026" encoding="base64url">eyJ2aWV3Qm94IjpbMSw0N10sInBvaW50cyI6IjAsMCAwLDQ3In0</pptd:line>
+                <pptd:line xmlns:pptd="https://kimi-design.msh.team/pptd/2026" xmlns:mc="http://schemas.openxmlformats.org/markup-compatibility/2006" xmlns:m="http://schemas.openxmlformats.org/officeDocument/2006/math" xmlns:cx="http://schemas.microsoft.com/office/drawing/2014/chartex" xmlns:c="http://schemas.openxmlformats.org/drawingml/2006/chart" xmlns:a14="http://schemas.microsoft.com/office/drawing/2010/main" xmlns="" encoding="base64url">eyJ2aWV3Qm94IjpbMSw0N10sInBvaW50cyI6IjAsMCAwLDQ3In0</pptd:line>
               </p:ext>
             </p:extLst>
           </p:nvPr>
@@ -13498,7 +13503,7 @@
           <p:nvPr>
             <p:extLst>
               <p:ext uri="{F5677B7D-0D2A-4D9B-9A5C-6D8D7D0E5A5D}">
-                <pptd:line xmlns="" xmlns:a14="http://schemas.microsoft.com/office/drawing/2010/main" xmlns:c="http://schemas.openxmlformats.org/drawingml/2006/chart" xmlns:cx="http://schemas.microsoft.com/office/drawing/2014/chartex" xmlns:m="http://schemas.openxmlformats.org/officeDocument/2006/math" xmlns:mc="http://schemas.openxmlformats.org/markup-compatibility/2006" xmlns:pptd="https://kimi-design.msh.team/pptd/2026" encoding="base64url">eyJ2aWV3Qm94IjpbODY0LDFdLCJwb2ludHMiOiIwLDAgODY0LDAifQ</pptd:line>
+                <pptd:line xmlns:pptd="https://kimi-design.msh.team/pptd/2026" xmlns:mc="http://schemas.openxmlformats.org/markup-compatibility/2006" xmlns:m="http://schemas.openxmlformats.org/officeDocument/2006/math" xmlns:cx="http://schemas.microsoft.com/office/drawing/2014/chartex" xmlns:c="http://schemas.openxmlformats.org/drawingml/2006/chart" xmlns:a14="http://schemas.microsoft.com/office/drawing/2010/main" xmlns="" encoding="base64url">eyJ2aWV3Qm94IjpbODY0LDFdLCJwb2ludHMiOiIwLDAgODY0LDAifQ</pptd:line>
               </p:ext>
             </p:extLst>
           </p:nvPr>
@@ -13703,7 +13708,7 @@
           <p:nvPr>
             <p:extLst>
               <p:ext uri="{F5677B7D-0D2A-4D9B-9A5C-6D8D7D0E5A5D}">
-                <pptd:line xmlns="" xmlns:a14="http://schemas.microsoft.com/office/drawing/2010/main" xmlns:c="http://schemas.openxmlformats.org/drawingml/2006/chart" xmlns:cx="http://schemas.microsoft.com/office/drawing/2014/chartex" xmlns:m="http://schemas.openxmlformats.org/officeDocument/2006/math" xmlns:mc="http://schemas.openxmlformats.org/markup-compatibility/2006" xmlns:pptd="https://kimi-design.msh.team/pptd/2026" encoding="base64url">eyJ2aWV3Qm94IjpbMSw5NV0sInBvaW50cyI6IjAsMCAwLDk1In0</pptd:line>
+                <pptd:line xmlns:pptd="https://kimi-design.msh.team/pptd/2026" xmlns:mc="http://schemas.openxmlformats.org/markup-compatibility/2006" xmlns:m="http://schemas.openxmlformats.org/officeDocument/2006/math" xmlns:cx="http://schemas.microsoft.com/office/drawing/2014/chartex" xmlns:c="http://schemas.openxmlformats.org/drawingml/2006/chart" xmlns:a14="http://schemas.microsoft.com/office/drawing/2010/main" xmlns="" encoding="base64url">eyJ2aWV3Qm94IjpbMSw5NV0sInBvaW50cyI6IjAsMCAwLDk1In0</pptd:line>
               </p:ext>
             </p:extLst>
           </p:nvPr>
@@ -14157,7 +14162,7 @@
               </a:lnSpc>
             </a:pPr>
             <a:r>
-              <a:rPr lang="en-US" sz="2800" b="1" noProof="1">
+              <a:rPr lang="en-US" sz="2600" b="1" noProof="1">
                 <a:solidFill>
                   <a:srgbClr val="172526"/>
                 </a:solidFill>
@@ -14167,7 +14172,7 @@
               <a:t>Масштабируем после испытания на реальной линии
 и подтверждения готовности персонала и процесса</a:t>
             </a:r>
-            <a:endParaRPr lang="en-US" sz="2800" noProof="1"/>
+            <a:endParaRPr lang="en-US" sz="2600" noProof="1"/>
           </a:p>
         </p:txBody>
       </p:sp>
@@ -14688,7 +14693,7 @@
           <p:nvPr>
             <p:extLst>
               <p:ext uri="{F5677B7D-0D2A-4D9B-9A5C-6D8D7D0E5A5D}">
-                <pptd:line xmlns="" xmlns:a14="http://schemas.microsoft.com/office/drawing/2010/main" xmlns:c="http://schemas.openxmlformats.org/drawingml/2006/chart" xmlns:cx="http://schemas.microsoft.com/office/drawing/2014/chartex" xmlns:m="http://schemas.openxmlformats.org/officeDocument/2006/math" xmlns:mc="http://schemas.openxmlformats.org/markup-compatibility/2006" xmlns:pptd="https://kimi-design.msh.team/pptd/2026" encoding="base64url">eyJ2aWV3Qm94IjpbODY0LDFdLCJwb2ludHMiOiIwLDAgODY0LDAifQ</pptd:line>
+                <pptd:line xmlns:pptd="https://kimi-design.msh.team/pptd/2026" xmlns:mc="http://schemas.openxmlformats.org/markup-compatibility/2006" xmlns:m="http://schemas.openxmlformats.org/officeDocument/2006/math" xmlns:cx="http://schemas.microsoft.com/office/drawing/2014/chartex" xmlns:c="http://schemas.openxmlformats.org/drawingml/2006/chart" xmlns:a14="http://schemas.microsoft.com/office/drawing/2010/main" xmlns="" encoding="base64url">eyJ2aWV3Qm94IjpbODY0LDFdLCJwb2ludHMiOiIwLDAgODY0LDAifQ</pptd:line>
               </p:ext>
             </p:extLst>
           </p:nvPr>
@@ -14887,7 +14892,7 @@
           <p:nvPr>
             <p:extLst>
               <p:ext uri="{F5677B7D-0D2A-4D9B-9A5C-6D8D7D0E5A5D}">
-                <pptd:line xmlns="" xmlns:a14="http://schemas.microsoft.com/office/drawing/2010/main" xmlns:c="http://schemas.openxmlformats.org/drawingml/2006/chart" xmlns:cx="http://schemas.microsoft.com/office/drawing/2014/chartex" xmlns:m="http://schemas.openxmlformats.org/officeDocument/2006/math" xmlns:mc="http://schemas.openxmlformats.org/markup-compatibility/2006" xmlns:pptd="https://kimi-design.msh.team/pptd/2026" encoding="base64url">eyJ2aWV3Qm94IjpbMSwxMTRdLCJwb2ludHMiOiIwLDAgMCwxMTQifQ</pptd:line>
+                <pptd:line xmlns:pptd="https://kimi-design.msh.team/pptd/2026" xmlns:mc="http://schemas.openxmlformats.org/markup-compatibility/2006" xmlns:m="http://schemas.openxmlformats.org/officeDocument/2006/math" xmlns:cx="http://schemas.microsoft.com/office/drawing/2014/chartex" xmlns:c="http://schemas.openxmlformats.org/drawingml/2006/chart" xmlns:a14="http://schemas.microsoft.com/office/drawing/2010/main" xmlns="" encoding="base64url">eyJ2aWV3Qm94IjpbMSwxMTRdLCJwb2ludHMiOiIwLDAgMCwxMTQifQ</pptd:line>
               </p:ext>
             </p:extLst>
           </p:nvPr>
@@ -15348,7 +15353,7 @@
               </a:lnSpc>
             </a:pPr>
             <a:r>
-              <a:rPr lang="en-US" sz="2800" b="1" noProof="1">
+              <a:rPr lang="en-US" sz="2600" b="1" noProof="1">
                 <a:solidFill>
                   <a:srgbClr val="172526"/>
                 </a:solidFill>
@@ -15358,7 +15363,7 @@
               <a:t>Проект устраняет причины конденсата в трёх цехах
 и автоматизирует контроль без остановки линии</a:t>
             </a:r>
-            <a:endParaRPr lang="en-US" sz="2800" noProof="1"/>
+            <a:endParaRPr lang="en-US" sz="2600" noProof="1"/>
           </a:p>
         </p:txBody>
       </p:sp>
@@ -15517,7 +15522,7 @@
           <p:nvPr>
             <p:extLst>
               <p:ext uri="{F5677B7D-0D2A-4D9B-9A5C-6D8D7D0E5A5D}">
-                <pptd:line xmlns="" xmlns:a14="http://schemas.microsoft.com/office/drawing/2010/main" xmlns:c="http://schemas.openxmlformats.org/drawingml/2006/chart" xmlns:cx="http://schemas.microsoft.com/office/drawing/2014/chartex" xmlns:m="http://schemas.openxmlformats.org/officeDocument/2006/math" xmlns:mc="http://schemas.openxmlformats.org/markup-compatibility/2006" xmlns:pptd="https://kimi-design.msh.team/pptd/2026" encoding="base64url">eyJ2aWV3Qm94IjpbODY0LDFdLCJwb2ludHMiOiIwLDAgODY0LDAifQ</pptd:line>
+                <pptd:line xmlns:pptd="https://kimi-design.msh.team/pptd/2026" xmlns:mc="http://schemas.openxmlformats.org/markup-compatibility/2006" xmlns:m="http://schemas.openxmlformats.org/officeDocument/2006/math" xmlns:cx="http://schemas.microsoft.com/office/drawing/2014/chartex" xmlns:c="http://schemas.openxmlformats.org/drawingml/2006/chart" xmlns:a14="http://schemas.microsoft.com/office/drawing/2010/main" xmlns="" encoding="base64url">eyJ2aWV3Qm94IjpbODY0LDFdLCJwb2ludHMiOiIwLDAgODY0LDAifQ</pptd:line>
               </p:ext>
             </p:extLst>
           </p:nvPr>
@@ -15560,7 +15565,7 @@
           <p:nvPr>
             <p:extLst>
               <p:ext uri="{F5677B7D-0D2A-4D9B-9A5C-6D8D7D0E5A5D}">
-                <pptd:icon xmlns="" xmlns:a14="http://schemas.microsoft.com/office/drawing/2010/main" xmlns:c="http://schemas.openxmlformats.org/drawingml/2006/chart" xmlns:cx="http://schemas.microsoft.com/office/drawing/2014/chartex" xmlns:m="http://schemas.openxmlformats.org/officeDocument/2006/math" xmlns:mc="http://schemas.openxmlformats.org/markup-compatibility/2006" xmlns:pptd="https://kimi-design.msh.team/pptd/2026" encoding="base64url">eyJpY29uTmFtZSI6ImZhczp0ZW1wZXJhdHVyZS1sb3cifQ</pptd:icon>
+                <pptd:icon xmlns:pptd="https://kimi-design.msh.team/pptd/2026" xmlns:mc="http://schemas.openxmlformats.org/markup-compatibility/2006" xmlns:m="http://schemas.openxmlformats.org/officeDocument/2006/math" xmlns:cx="http://schemas.microsoft.com/office/drawing/2014/chartex" xmlns:c="http://schemas.openxmlformats.org/drawingml/2006/chart" xmlns:a14="http://schemas.microsoft.com/office/drawing/2010/main" xmlns="" encoding="base64url">eyJpY29uTmFtZSI6ImZhczp0ZW1wZXJhdHVyZS1sb3cifQ</pptd:icon>
               </p:ext>
             </p:extLst>
           </p:nvPr>
@@ -15908,7 +15913,7 @@
           <p:nvPr>
             <p:extLst>
               <p:ext uri="{F5677B7D-0D2A-4D9B-9A5C-6D8D7D0E5A5D}">
-                <pptd:line xmlns="" xmlns:a14="http://schemas.microsoft.com/office/drawing/2010/main" xmlns:c="http://schemas.openxmlformats.org/drawingml/2006/chart" xmlns:cx="http://schemas.microsoft.com/office/drawing/2014/chartex" xmlns:m="http://schemas.openxmlformats.org/officeDocument/2006/math" xmlns:mc="http://schemas.openxmlformats.org/markup-compatibility/2006" xmlns:pptd="https://kimi-design.msh.team/pptd/2026" encoding="base64url">eyJ2aWV3Qm94IjpbODY0LDFdLCJwb2ludHMiOiIwLDAgODY0LDAifQ</pptd:line>
+                <pptd:line xmlns:pptd="https://kimi-design.msh.team/pptd/2026" xmlns:mc="http://schemas.openxmlformats.org/markup-compatibility/2006" xmlns:m="http://schemas.openxmlformats.org/officeDocument/2006/math" xmlns:cx="http://schemas.microsoft.com/office/drawing/2014/chartex" xmlns:c="http://schemas.openxmlformats.org/drawingml/2006/chart" xmlns:a14="http://schemas.microsoft.com/office/drawing/2010/main" xmlns="" encoding="base64url">eyJ2aWV3Qm94IjpbODY0LDFdLCJwb2ludHMiOiIwLDAgODY0LDAifQ</pptd:line>
               </p:ext>
             </p:extLst>
           </p:nvPr>
@@ -15951,7 +15956,7 @@
           <p:nvPr>
             <p:extLst>
               <p:ext uri="{F5677B7D-0D2A-4D9B-9A5C-6D8D7D0E5A5D}">
-                <pptd:icon xmlns="" xmlns:a14="http://schemas.microsoft.com/office/drawing/2010/main" xmlns:c="http://schemas.openxmlformats.org/drawingml/2006/chart" xmlns:cx="http://schemas.microsoft.com/office/drawing/2014/chartex" xmlns:m="http://schemas.openxmlformats.org/officeDocument/2006/math" xmlns:mc="http://schemas.openxmlformats.org/markup-compatibility/2006" xmlns:pptd="https://kimi-design.msh.team/pptd/2026" encoding="base64url">eyJpY29uTmFtZSI6ImZhczpjYW1lcmEifQ</pptd:icon>
+                <pptd:icon xmlns:pptd="https://kimi-design.msh.team/pptd/2026" xmlns:mc="http://schemas.openxmlformats.org/markup-compatibility/2006" xmlns:m="http://schemas.openxmlformats.org/officeDocument/2006/math" xmlns:cx="http://schemas.microsoft.com/office/drawing/2014/chartex" xmlns:c="http://schemas.openxmlformats.org/drawingml/2006/chart" xmlns:a14="http://schemas.microsoft.com/office/drawing/2010/main" xmlns="" encoding="base64url">eyJpY29uTmFtZSI6ImZhczpjYW1lcmEifQ</pptd:icon>
               </p:ext>
             </p:extLst>
           </p:nvPr>
@@ -16251,7 +16256,7 @@
           <p:nvPr>
             <p:extLst>
               <p:ext uri="{F5677B7D-0D2A-4D9B-9A5C-6D8D7D0E5A5D}">
-                <pptd:line xmlns="" xmlns:a14="http://schemas.microsoft.com/office/drawing/2010/main" xmlns:c="http://schemas.openxmlformats.org/drawingml/2006/chart" xmlns:cx="http://schemas.microsoft.com/office/drawing/2014/chartex" xmlns:m="http://schemas.openxmlformats.org/officeDocument/2006/math" xmlns:mc="http://schemas.openxmlformats.org/markup-compatibility/2006" xmlns:pptd="https://kimi-design.msh.team/pptd/2026" encoding="base64url">eyJ2aWV3Qm94IjpbODY0LDFdLCJwb2ludHMiOiIwLDAgODY0LDAifQ</pptd:line>
+                <pptd:line xmlns:pptd="https://kimi-design.msh.team/pptd/2026" xmlns:mc="http://schemas.openxmlformats.org/markup-compatibility/2006" xmlns:m="http://schemas.openxmlformats.org/officeDocument/2006/math" xmlns:cx="http://schemas.microsoft.com/office/drawing/2014/chartex" xmlns:c="http://schemas.openxmlformats.org/drawingml/2006/chart" xmlns:a14="http://schemas.microsoft.com/office/drawing/2010/main" xmlns="" encoding="base64url">eyJ2aWV3Qm94IjpbODY0LDFdLCJwb2ludHMiOiIwLDAgODY0LDAifQ</pptd:line>
               </p:ext>
             </p:extLst>
           </p:nvPr>
@@ -16294,7 +16299,7 @@
           <p:nvPr>
             <p:extLst>
               <p:ext uri="{F5677B7D-0D2A-4D9B-9A5C-6D8D7D0E5A5D}">
-                <pptd:icon xmlns="" xmlns:a14="http://schemas.microsoft.com/office/drawing/2010/main" xmlns:c="http://schemas.openxmlformats.org/drawingml/2006/chart" xmlns:cx="http://schemas.microsoft.com/office/drawing/2014/chartex" xmlns:m="http://schemas.openxmlformats.org/officeDocument/2006/math" xmlns:mc="http://schemas.openxmlformats.org/markup-compatibility/2006" xmlns:pptd="https://kimi-design.msh.team/pptd/2026" encoding="base64url">eyJpY29uTmFtZSI6ImZhczp0cnVjayJ9</pptd:icon>
+                <pptd:icon xmlns:pptd="https://kimi-design.msh.team/pptd/2026" xmlns:mc="http://schemas.openxmlformats.org/markup-compatibility/2006" xmlns:m="http://schemas.openxmlformats.org/officeDocument/2006/math" xmlns:cx="http://schemas.microsoft.com/office/drawing/2014/chartex" xmlns:c="http://schemas.openxmlformats.org/drawingml/2006/chart" xmlns:a14="http://schemas.microsoft.com/office/drawing/2010/main" xmlns="" encoding="base64url">eyJpY29uTmFtZSI6ImZhczp0cnVjayJ9</pptd:icon>
               </p:ext>
             </p:extLst>
           </p:nvPr>
@@ -16919,7 +16924,7 @@
               </a:lnSpc>
             </a:pPr>
             <a:r>
-              <a:rPr lang="en-US" sz="2700" b="1" noProof="1">
+              <a:rPr lang="en-US" sz="2600" b="1" noProof="1">
                 <a:solidFill>
                   <a:srgbClr val="172526"/>
                 </a:solidFill>
@@ -16929,7 +16934,7 @@
               <a:t>Масштабируем решение только после подтверждения
 экономического эффекта и стабильной работы на пилоте</a:t>
             </a:r>
-            <a:endParaRPr lang="en-US" sz="2700" noProof="1"/>
+            <a:endParaRPr lang="en-US" sz="2600" noProof="1"/>
           </a:p>
         </p:txBody>
       </p:sp>
@@ -17462,7 +17467,7 @@
           <p:nvPr>
             <p:extLst>
               <p:ext uri="{F5677B7D-0D2A-4D9B-9A5C-6D8D7D0E5A5D}">
-                <pptd:line xmlns="" xmlns:a14="http://schemas.microsoft.com/office/drawing/2010/main" xmlns:c="http://schemas.openxmlformats.org/drawingml/2006/chart" xmlns:cx="http://schemas.microsoft.com/office/drawing/2014/chartex" xmlns:m="http://schemas.openxmlformats.org/officeDocument/2006/math" xmlns:mc="http://schemas.openxmlformats.org/markup-compatibility/2006" xmlns:pptd="https://kimi-design.msh.team/pptd/2026" encoding="base64url">eyJ2aWV3Qm94IjpbMSwzNTBdLCJwb2ludHMiOiIwLDAgMCwzNTAifQ</pptd:line>
+                <pptd:line xmlns:pptd="https://kimi-design.msh.team/pptd/2026" xmlns:mc="http://schemas.openxmlformats.org/markup-compatibility/2006" xmlns:m="http://schemas.openxmlformats.org/officeDocument/2006/math" xmlns:cx="http://schemas.microsoft.com/office/drawing/2014/chartex" xmlns:c="http://schemas.openxmlformats.org/drawingml/2006/chart" xmlns:a14="http://schemas.microsoft.com/office/drawing/2010/main" xmlns="" encoding="base64url">eyJ2aWV3Qm94IjpbMSwzNTBdLCJwb2ludHMiOiIwLDAgMCwzNTAifQ</pptd:line>
               </p:ext>
             </p:extLst>
           </p:nvPr>
@@ -18184,7 +18189,7 @@
               </a:lnSpc>
             </a:pPr>
             <a:r>
-              <a:rPr lang="en-US" sz="2800" b="1" noProof="1">
+              <a:rPr lang="en-US" sz="2600" b="1" noProof="1">
                 <a:solidFill>
                   <a:srgbClr val="172526"/>
                 </a:solidFill>
@@ -18194,7 +18199,7 @@
               <a:t>До внедрения фиксируем качество, трудозатраты
 и потери - эта база определит эффект проекта</a:t>
             </a:r>
-            <a:endParaRPr lang="en-US" sz="2800" noProof="1"/>
+            <a:endParaRPr lang="en-US" sz="2600" noProof="1"/>
           </a:p>
         </p:txBody>
       </p:sp>
@@ -18353,7 +18358,7 @@
           <p:nvPr>
             <p:extLst>
               <p:ext uri="{F5677B7D-0D2A-4D9B-9A5C-6D8D7D0E5A5D}">
-                <pptd:line xmlns="" xmlns:a14="http://schemas.microsoft.com/office/drawing/2010/main" xmlns:c="http://schemas.openxmlformats.org/drawingml/2006/chart" xmlns:cx="http://schemas.microsoft.com/office/drawing/2014/chartex" xmlns:m="http://schemas.openxmlformats.org/officeDocument/2006/math" xmlns:mc="http://schemas.openxmlformats.org/markup-compatibility/2006" xmlns:pptd="https://kimi-design.msh.team/pptd/2026" encoding="base64url">eyJ2aWV3Qm94IjpbODY0LDFdLCJwb2ludHMiOiIwLDAgODY0LDAifQ</pptd:line>
+                <pptd:line xmlns:pptd="https://kimi-design.msh.team/pptd/2026" xmlns:mc="http://schemas.openxmlformats.org/markup-compatibility/2006" xmlns:m="http://schemas.openxmlformats.org/officeDocument/2006/math" xmlns:cx="http://schemas.microsoft.com/office/drawing/2014/chartex" xmlns:c="http://schemas.openxmlformats.org/drawingml/2006/chart" xmlns:a14="http://schemas.microsoft.com/office/drawing/2010/main" xmlns="" encoding="base64url">eyJ2aWV3Qm94IjpbODY0LDFdLCJwb2ludHMiOiIwLDAgODY0LDAifQ</pptd:line>
               </p:ext>
             </p:extLst>
           </p:nvPr>
@@ -18396,7 +18401,7 @@
           <p:nvPr>
             <p:extLst>
               <p:ext uri="{F5677B7D-0D2A-4D9B-9A5C-6D8D7D0E5A5D}">
-                <pptd:icon xmlns="" xmlns:a14="http://schemas.microsoft.com/office/drawing/2010/main" xmlns:c="http://schemas.openxmlformats.org/drawingml/2006/chart" xmlns:cx="http://schemas.microsoft.com/office/drawing/2014/chartex" xmlns:m="http://schemas.openxmlformats.org/officeDocument/2006/math" xmlns:mc="http://schemas.openxmlformats.org/markup-compatibility/2006" xmlns:pptd="https://kimi-design.msh.team/pptd/2026" encoding="base64url">eyJpY29uTmFtZSI6ImZhczp0ZW1wZXJhdHVyZS1sb3cifQ</pptd:icon>
+                <pptd:icon xmlns:pptd="https://kimi-design.msh.team/pptd/2026" xmlns:mc="http://schemas.openxmlformats.org/markup-compatibility/2006" xmlns:m="http://schemas.openxmlformats.org/officeDocument/2006/math" xmlns:cx="http://schemas.microsoft.com/office/drawing/2014/chartex" xmlns:c="http://schemas.openxmlformats.org/drawingml/2006/chart" xmlns:a14="http://schemas.microsoft.com/office/drawing/2010/main" xmlns="" encoding="base64url">eyJpY29uTmFtZSI6ImZhczp0ZW1wZXJhdHVyZS1sb3cifQ</pptd:icon>
               </p:ext>
             </p:extLst>
           </p:nvPr>
@@ -18780,7 +18785,7 @@
           <p:nvPr>
             <p:extLst>
               <p:ext uri="{F5677B7D-0D2A-4D9B-9A5C-6D8D7D0E5A5D}">
-                <pptd:line xmlns="" xmlns:a14="http://schemas.microsoft.com/office/drawing/2010/main" xmlns:c="http://schemas.openxmlformats.org/drawingml/2006/chart" xmlns:cx="http://schemas.microsoft.com/office/drawing/2014/chartex" xmlns:m="http://schemas.openxmlformats.org/officeDocument/2006/math" xmlns:mc="http://schemas.openxmlformats.org/markup-compatibility/2006" xmlns:pptd="https://kimi-design.msh.team/pptd/2026" encoding="base64url">eyJ2aWV3Qm94IjpbODY0LDFdLCJwb2ludHMiOiIwLDAgODY0LDAifQ</pptd:line>
+                <pptd:line xmlns:pptd="https://kimi-design.msh.team/pptd/2026" xmlns:mc="http://schemas.openxmlformats.org/markup-compatibility/2006" xmlns:m="http://schemas.openxmlformats.org/officeDocument/2006/math" xmlns:cx="http://schemas.microsoft.com/office/drawing/2014/chartex" xmlns:c="http://schemas.openxmlformats.org/drawingml/2006/chart" xmlns:a14="http://schemas.microsoft.com/office/drawing/2010/main" xmlns="" encoding="base64url">eyJ2aWV3Qm94IjpbODY0LDFdLCJwb2ludHMiOiIwLDAgODY0LDAifQ</pptd:line>
               </p:ext>
             </p:extLst>
           </p:nvPr>
@@ -18823,7 +18828,7 @@
           <p:nvPr>
             <p:extLst>
               <p:ext uri="{F5677B7D-0D2A-4D9B-9A5C-6D8D7D0E5A5D}">
-                <pptd:icon xmlns="" xmlns:a14="http://schemas.microsoft.com/office/drawing/2010/main" xmlns:c="http://schemas.openxmlformats.org/drawingml/2006/chart" xmlns:cx="http://schemas.microsoft.com/office/drawing/2014/chartex" xmlns:m="http://schemas.openxmlformats.org/officeDocument/2006/math" xmlns:mc="http://schemas.openxmlformats.org/markup-compatibility/2006" xmlns:pptd="https://kimi-design.msh.team/pptd/2026" encoding="base64url">eyJpY29uTmFtZSI6ImZhczpib3gtb3BlbiJ9</pptd:icon>
+                <pptd:icon xmlns:pptd="https://kimi-design.msh.team/pptd/2026" xmlns:mc="http://schemas.openxmlformats.org/markup-compatibility/2006" xmlns:m="http://schemas.openxmlformats.org/officeDocument/2006/math" xmlns:cx="http://schemas.microsoft.com/office/drawing/2014/chartex" xmlns:c="http://schemas.openxmlformats.org/drawingml/2006/chart" xmlns:a14="http://schemas.microsoft.com/office/drawing/2010/main" xmlns="" encoding="base64url">eyJpY29uTmFtZSI6ImZhczpib3gtb3BlbiJ9</pptd:icon>
               </p:ext>
             </p:extLst>
           </p:nvPr>
@@ -19165,7 +19170,7 @@
           <p:nvPr>
             <p:extLst>
               <p:ext uri="{F5677B7D-0D2A-4D9B-9A5C-6D8D7D0E5A5D}">
-                <pptd:line xmlns="" xmlns:a14="http://schemas.microsoft.com/office/drawing/2010/main" xmlns:c="http://schemas.openxmlformats.org/drawingml/2006/chart" xmlns:cx="http://schemas.microsoft.com/office/drawing/2014/chartex" xmlns:m="http://schemas.openxmlformats.org/officeDocument/2006/math" xmlns:mc="http://schemas.openxmlformats.org/markup-compatibility/2006" xmlns:pptd="https://kimi-design.msh.team/pptd/2026" encoding="base64url">eyJ2aWV3Qm94IjpbODY0LDFdLCJwb2ludHMiOiIwLDAgODY0LDAifQ</pptd:line>
+                <pptd:line xmlns:pptd="https://kimi-design.msh.team/pptd/2026" xmlns:mc="http://schemas.openxmlformats.org/markup-compatibility/2006" xmlns:m="http://schemas.openxmlformats.org/officeDocument/2006/math" xmlns:cx="http://schemas.microsoft.com/office/drawing/2014/chartex" xmlns:c="http://schemas.openxmlformats.org/drawingml/2006/chart" xmlns:a14="http://schemas.microsoft.com/office/drawing/2010/main" xmlns="" encoding="base64url">eyJ2aWV3Qm94IjpbODY0LDFdLCJwb2ludHMiOiIwLDAgODY0LDAifQ</pptd:line>
               </p:ext>
             </p:extLst>
           </p:nvPr>
@@ -19208,7 +19213,7 @@
           <p:nvPr>
             <p:extLst>
               <p:ext uri="{F5677B7D-0D2A-4D9B-9A5C-6D8D7D0E5A5D}">
-                <pptd:icon xmlns="" xmlns:a14="http://schemas.microsoft.com/office/drawing/2010/main" xmlns:c="http://schemas.openxmlformats.org/drawingml/2006/chart" xmlns:cx="http://schemas.microsoft.com/office/drawing/2014/chartex" xmlns:m="http://schemas.openxmlformats.org/officeDocument/2006/math" xmlns:mc="http://schemas.openxmlformats.org/markup-compatibility/2006" xmlns:pptd="https://kimi-design.msh.team/pptd/2026" encoding="base64url">eyJpY29uTmFtZSI6ImZhczp0cnVjayJ9</pptd:icon>
+                <pptd:icon xmlns:pptd="https://kimi-design.msh.team/pptd/2026" xmlns:mc="http://schemas.openxmlformats.org/markup-compatibility/2006" xmlns:m="http://schemas.openxmlformats.org/officeDocument/2006/math" xmlns:cx="http://schemas.microsoft.com/office/drawing/2014/chartex" xmlns:c="http://schemas.openxmlformats.org/drawingml/2006/chart" xmlns:a14="http://schemas.microsoft.com/office/drawing/2010/main" xmlns="" encoding="base64url">eyJpY29uTmFtZSI6ImZhczp0cnVjayJ9</pptd:icon>
               </p:ext>
             </p:extLst>
           </p:nvPr>
@@ -19836,7 +19841,7 @@
               </a:lnSpc>
             </a:pPr>
             <a:r>
-              <a:rPr lang="en-US" sz="2800" b="1" noProof="1">
+              <a:rPr lang="en-US" sz="2600" b="1" noProof="1">
                 <a:solidFill>
                   <a:srgbClr val="172526"/>
                 </a:solidFill>
@@ -19846,7 +19851,7 @@
               <a:t>Общие потери в точке А складываются из четырёх частей. </a:t>
             </a:r>
             <a:r>
-              <a:rPr lang="ru-RU" sz="2800" b="1" noProof="1">
+              <a:rPr lang="ru-RU" sz="2600" b="1" noProof="1">
                 <a:solidFill>
                   <a:srgbClr val="172526"/>
                 </a:solidFill>
@@ -19856,7 +19861,7 @@
               <a:t>О</a:t>
             </a:r>
             <a:r>
-              <a:rPr lang="en-US" sz="2800" b="1" noProof="1">
+              <a:rPr lang="en-US" sz="2600" b="1" noProof="1">
                 <a:solidFill>
                   <a:srgbClr val="172526"/>
                 </a:solidFill>
@@ -19865,7 +19870,7 @@
               </a:rPr>
               <a:t>дну себестоимость учитываем только один раз</a:t>
             </a:r>
-            <a:endParaRPr lang="en-US" sz="2800" noProof="1"/>
+            <a:endParaRPr lang="en-US" sz="2600" noProof="1"/>
           </a:p>
         </p:txBody>
       </p:sp>
@@ -19982,7 +19987,7 @@
           <p:nvPr>
             <p:extLst>
               <p:ext uri="{F5677B7D-0D2A-4D9B-9A5C-6D8D7D0E5A5D}">
-                <pptd:line xmlns="" xmlns:a14="http://schemas.microsoft.com/office/drawing/2010/main" xmlns:c="http://schemas.openxmlformats.org/drawingml/2006/chart" xmlns:cx="http://schemas.microsoft.com/office/drawing/2014/chartex" xmlns:m="http://schemas.openxmlformats.org/officeDocument/2006/math" xmlns:mc="http://schemas.openxmlformats.org/markup-compatibility/2006" xmlns:pptd="https://kimi-design.msh.team/pptd/2026" encoding="base64url">eyJ2aWV3Qm94IjpbODY0LDFdLCJwb2ludHMiOiIwLDAgODY0LDAifQ</pptd:line>
+                <pptd:line xmlns:pptd="https://kimi-design.msh.team/pptd/2026" xmlns:mc="http://schemas.openxmlformats.org/markup-compatibility/2006" xmlns:m="http://schemas.openxmlformats.org/officeDocument/2006/math" xmlns:cx="http://schemas.microsoft.com/office/drawing/2014/chartex" xmlns:c="http://schemas.openxmlformats.org/drawingml/2006/chart" xmlns:a14="http://schemas.microsoft.com/office/drawing/2010/main" xmlns="" encoding="base64url">eyJ2aWV3Qm94IjpbODY0LDFdLCJwb2ludHMiOiIwLDAgODY0LDAifQ</pptd:line>
               </p:ext>
             </p:extLst>
           </p:nvPr>
@@ -20025,7 +20030,7 @@
           <p:nvPr>
             <p:extLst>
               <p:ext uri="{F5677B7D-0D2A-4D9B-9A5C-6D8D7D0E5A5D}">
-                <pptd:icon xmlns="" xmlns:a14="http://schemas.microsoft.com/office/drawing/2010/main" xmlns:c="http://schemas.openxmlformats.org/drawingml/2006/chart" xmlns:cx="http://schemas.microsoft.com/office/drawing/2014/chartex" xmlns:m="http://schemas.openxmlformats.org/officeDocument/2006/math" xmlns:mc="http://schemas.openxmlformats.org/markup-compatibility/2006" xmlns:pptd="https://kimi-design.msh.team/pptd/2026" encoding="base64url">eyJpY29uTmFtZSI6ImZhczp1c2VyLWNoZWNrIn0</pptd:icon>
+                <pptd:icon xmlns:pptd="https://kimi-design.msh.team/pptd/2026" xmlns:mc="http://schemas.openxmlformats.org/markup-compatibility/2006" xmlns:m="http://schemas.openxmlformats.org/officeDocument/2006/math" xmlns:cx="http://schemas.microsoft.com/office/drawing/2014/chartex" xmlns:c="http://schemas.openxmlformats.org/drawingml/2006/chart" xmlns:a14="http://schemas.microsoft.com/office/drawing/2010/main" xmlns="" encoding="base64url">eyJpY29uTmFtZSI6ImZhczp1c2VyLWNoZWNrIn0</pptd:icon>
               </p:ext>
             </p:extLst>
           </p:nvPr>
@@ -20291,7 +20296,7 @@
           <p:nvPr>
             <p:extLst>
               <p:ext uri="{F5677B7D-0D2A-4D9B-9A5C-6D8D7D0E5A5D}">
-                <pptd:icon xmlns="" xmlns:a14="http://schemas.microsoft.com/office/drawing/2010/main" xmlns:c="http://schemas.openxmlformats.org/drawingml/2006/chart" xmlns:cx="http://schemas.microsoft.com/office/drawing/2014/chartex" xmlns:m="http://schemas.openxmlformats.org/officeDocument/2006/math" xmlns:mc="http://schemas.openxmlformats.org/markup-compatibility/2006" xmlns:pptd="https://kimi-design.msh.team/pptd/2026" encoding="base64url">eyJpY29uTmFtZSI6ImZhczpwYXVzZSJ9</pptd:icon>
+                <pptd:icon xmlns:pptd="https://kimi-design.msh.team/pptd/2026" xmlns:mc="http://schemas.openxmlformats.org/markup-compatibility/2006" xmlns:m="http://schemas.openxmlformats.org/officeDocument/2006/math" xmlns:cx="http://schemas.microsoft.com/office/drawing/2014/chartex" xmlns:c="http://schemas.openxmlformats.org/drawingml/2006/chart" xmlns:a14="http://schemas.microsoft.com/office/drawing/2010/main" xmlns="" encoding="base64url">eyJpY29uTmFtZSI6ImZhczpwYXVzZSJ9</pptd:icon>
               </p:ext>
             </p:extLst>
           </p:nvPr>
@@ -20525,7 +20530,7 @@
           <p:nvPr>
             <p:extLst>
               <p:ext uri="{F5677B7D-0D2A-4D9B-9A5C-6D8D7D0E5A5D}">
-                <pptd:line xmlns="" xmlns:a14="http://schemas.microsoft.com/office/drawing/2010/main" xmlns:c="http://schemas.openxmlformats.org/drawingml/2006/chart" xmlns:cx="http://schemas.microsoft.com/office/drawing/2014/chartex" xmlns:m="http://schemas.openxmlformats.org/officeDocument/2006/math" xmlns:mc="http://schemas.openxmlformats.org/markup-compatibility/2006" xmlns:pptd="https://kimi-design.msh.team/pptd/2026" encoding="base64url">eyJ2aWV3Qm94IjpbMSwxMDVdLCJwb2ludHMiOiIwLDAgMCwxMDUifQ</pptd:line>
+                <pptd:line xmlns:pptd="https://kimi-design.msh.team/pptd/2026" xmlns:mc="http://schemas.openxmlformats.org/markup-compatibility/2006" xmlns:m="http://schemas.openxmlformats.org/officeDocument/2006/math" xmlns:cx="http://schemas.microsoft.com/office/drawing/2014/chartex" xmlns:c="http://schemas.openxmlformats.org/drawingml/2006/chart" xmlns:a14="http://schemas.microsoft.com/office/drawing/2010/main" xmlns="" encoding="base64url">eyJ2aWV3Qm94IjpbMSwxMDVdLCJwb2ludHMiOiIwLDAgMCwxMDUifQ</pptd:line>
               </p:ext>
             </p:extLst>
           </p:nvPr>
@@ -20568,7 +20573,7 @@
           <p:nvPr>
             <p:extLst>
               <p:ext uri="{F5677B7D-0D2A-4D9B-9A5C-6D8D7D0E5A5D}">
-                <pptd:line xmlns="" xmlns:a14="http://schemas.microsoft.com/office/drawing/2010/main" xmlns:c="http://schemas.openxmlformats.org/drawingml/2006/chart" xmlns:cx="http://schemas.microsoft.com/office/drawing/2014/chartex" xmlns:m="http://schemas.openxmlformats.org/officeDocument/2006/math" xmlns:mc="http://schemas.openxmlformats.org/markup-compatibility/2006" xmlns:pptd="https://kimi-design.msh.team/pptd/2026" encoding="base64url">eyJ2aWV3Qm94IjpbODY0LDFdLCJwb2ludHMiOiIwLDAgODY0LDAifQ</pptd:line>
+                <pptd:line xmlns:pptd="https://kimi-design.msh.team/pptd/2026" xmlns:mc="http://schemas.openxmlformats.org/markup-compatibility/2006" xmlns:m="http://schemas.openxmlformats.org/officeDocument/2006/math" xmlns:cx="http://schemas.microsoft.com/office/drawing/2014/chartex" xmlns:c="http://schemas.openxmlformats.org/drawingml/2006/chart" xmlns:a14="http://schemas.microsoft.com/office/drawing/2010/main" xmlns="" encoding="base64url">eyJ2aWV3Qm94IjpbODY0LDFdLCJwb2ludHMiOiIwLDAgODY0LDAifQ</pptd:line>
               </p:ext>
             </p:extLst>
           </p:nvPr>
@@ -20611,7 +20616,7 @@
           <p:nvPr>
             <p:extLst>
               <p:ext uri="{F5677B7D-0D2A-4D9B-9A5C-6D8D7D0E5A5D}">
-                <pptd:icon xmlns="" xmlns:a14="http://schemas.microsoft.com/office/drawing/2010/main" xmlns:c="http://schemas.openxmlformats.org/drawingml/2006/chart" xmlns:cx="http://schemas.microsoft.com/office/drawing/2014/chartex" xmlns:m="http://schemas.openxmlformats.org/officeDocument/2006/math" xmlns:mc="http://schemas.openxmlformats.org/markup-compatibility/2006" xmlns:pptd="https://kimi-design.msh.team/pptd/2026" encoding="base64url">eyJpY29uTmFtZSI6ImZhczp0cmFzaC1jYW4ifQ</pptd:icon>
+                <pptd:icon xmlns:pptd="https://kimi-design.msh.team/pptd/2026" xmlns:mc="http://schemas.openxmlformats.org/markup-compatibility/2006" xmlns:m="http://schemas.openxmlformats.org/officeDocument/2006/math" xmlns:cx="http://schemas.microsoft.com/office/drawing/2014/chartex" xmlns:c="http://schemas.openxmlformats.org/drawingml/2006/chart" xmlns:a14="http://schemas.microsoft.com/office/drawing/2010/main" xmlns="" encoding="base64url">eyJpY29uTmFtZSI6ImZhczp0cmFzaC1jYW4ifQ</pptd:icon>
               </p:ext>
             </p:extLst>
           </p:nvPr>
@@ -20943,7 +20948,7 @@
           <p:nvPr>
             <p:extLst>
               <p:ext uri="{F5677B7D-0D2A-4D9B-9A5C-6D8D7D0E5A5D}">
-                <pptd:icon xmlns="" xmlns:a14="http://schemas.microsoft.com/office/drawing/2010/main" xmlns:c="http://schemas.openxmlformats.org/drawingml/2006/chart" xmlns:cx="http://schemas.microsoft.com/office/drawing/2014/chartex" xmlns:m="http://schemas.openxmlformats.org/officeDocument/2006/math" xmlns:mc="http://schemas.openxmlformats.org/markup-compatibility/2006" xmlns:pptd="https://kimi-design.msh.team/pptd/2026" encoding="base64url">eyJpY29uTmFtZSI6ImZhczpyb3RhdGUtbGVmdCJ9</pptd:icon>
+                <pptd:icon xmlns:pptd="https://kimi-design.msh.team/pptd/2026" xmlns:mc="http://schemas.openxmlformats.org/markup-compatibility/2006" xmlns:m="http://schemas.openxmlformats.org/officeDocument/2006/math" xmlns:cx="http://schemas.microsoft.com/office/drawing/2014/chartex" xmlns:c="http://schemas.openxmlformats.org/drawingml/2006/chart" xmlns:a14="http://schemas.microsoft.com/office/drawing/2010/main" xmlns="" encoding="base64url">eyJpY29uTmFtZSI6ImZhczpyb3RhdGUtbGVmdCJ9</pptd:icon>
               </p:ext>
             </p:extLst>
           </p:nvPr>
@@ -21196,7 +21201,7 @@
           <p:nvPr>
             <p:extLst>
               <p:ext uri="{F5677B7D-0D2A-4D9B-9A5C-6D8D7D0E5A5D}">
-                <pptd:line xmlns="" xmlns:a14="http://schemas.microsoft.com/office/drawing/2010/main" xmlns:c="http://schemas.openxmlformats.org/drawingml/2006/chart" xmlns:cx="http://schemas.microsoft.com/office/drawing/2014/chartex" xmlns:m="http://schemas.openxmlformats.org/officeDocument/2006/math" xmlns:mc="http://schemas.openxmlformats.org/markup-compatibility/2006" xmlns:pptd="https://kimi-design.msh.team/pptd/2026" encoding="base64url">eyJ2aWV3Qm94IjpbMSw5NF0sInBvaW50cyI6IjAsMCAwLDk0In0</pptd:line>
+                <pptd:line xmlns:pptd="https://kimi-design.msh.team/pptd/2026" xmlns:mc="http://schemas.openxmlformats.org/markup-compatibility/2006" xmlns:m="http://schemas.openxmlformats.org/officeDocument/2006/math" xmlns:cx="http://schemas.microsoft.com/office/drawing/2014/chartex" xmlns:c="http://schemas.openxmlformats.org/drawingml/2006/chart" xmlns:a14="http://schemas.microsoft.com/office/drawing/2010/main" xmlns="" encoding="base64url">eyJ2aWV3Qm94IjpbMSw5NF0sInBvaW50cyI6IjAsMCAwLDk0In0</pptd:line>
               </p:ext>
             </p:extLst>
           </p:nvPr>
@@ -21486,7 +21491,7 @@
               </a:lnSpc>
             </a:pPr>
             <a:r>
-              <a:rPr lang="en-US" sz="2800" b="1" noProof="1">
+              <a:rPr lang="en-US" sz="2600" b="1" noProof="1">
                 <a:solidFill>
                   <a:srgbClr val="172526"/>
                 </a:solidFill>
@@ -21496,7 +21501,7 @@
               <a:t>Издержки относим на первый подтверждённый этап;
 нераспределённые не делим до завершения проверки</a:t>
             </a:r>
-            <a:endParaRPr lang="en-US" sz="2800" noProof="1"/>
+            <a:endParaRPr lang="en-US" sz="2600" noProof="1"/>
           </a:p>
         </p:txBody>
       </p:sp>
@@ -21697,7 +21702,7 @@
           <p:nvPr>
             <p:extLst>
               <p:ext uri="{F5677B7D-0D2A-4D9B-9A5C-6D8D7D0E5A5D}">
-                <pptd:line xmlns="" xmlns:a14="http://schemas.microsoft.com/office/drawing/2010/main" xmlns:c="http://schemas.openxmlformats.org/drawingml/2006/chart" xmlns:cx="http://schemas.microsoft.com/office/drawing/2014/chartex" xmlns:m="http://schemas.openxmlformats.org/officeDocument/2006/math" xmlns:mc="http://schemas.openxmlformats.org/markup-compatibility/2006" xmlns:pptd="https://kimi-design.msh.team/pptd/2026" encoding="base64url">eyJ2aWV3Qm94IjpbNDcsMV0sInBvaW50cyI6IjAsMCA0NywwIn0</pptd:line>
+                <pptd:line xmlns:pptd="https://kimi-design.msh.team/pptd/2026" xmlns:mc="http://schemas.openxmlformats.org/markup-compatibility/2006" xmlns:m="http://schemas.openxmlformats.org/officeDocument/2006/math" xmlns:cx="http://schemas.microsoft.com/office/drawing/2014/chartex" xmlns:c="http://schemas.openxmlformats.org/drawingml/2006/chart" xmlns:a14="http://schemas.microsoft.com/office/drawing/2010/main" xmlns="" encoding="base64url">eyJ2aWV3Qm94IjpbNDcsMV0sInBvaW50cyI6IjAsMCA0NywwIn0</pptd:line>
               </p:ext>
             </p:extLst>
           </p:nvPr>
@@ -21867,7 +21872,7 @@
           <p:nvPr>
             <p:extLst>
               <p:ext uri="{F5677B7D-0D2A-4D9B-9A5C-6D8D7D0E5A5D}">
-                <pptd:line xmlns="" xmlns:a14="http://schemas.microsoft.com/office/drawing/2010/main" xmlns:c="http://schemas.openxmlformats.org/drawingml/2006/chart" xmlns:cx="http://schemas.microsoft.com/office/drawing/2014/chartex" xmlns:m="http://schemas.openxmlformats.org/officeDocument/2006/math" xmlns:mc="http://schemas.openxmlformats.org/markup-compatibility/2006" xmlns:pptd="https://kimi-design.msh.team/pptd/2026" encoding="base64url">eyJ2aWV3Qm94IjpbNDcsMV0sInBvaW50cyI6IjAsMCA0NywwIn0</pptd:line>
+                <pptd:line xmlns:pptd="https://kimi-design.msh.team/pptd/2026" xmlns:mc="http://schemas.openxmlformats.org/markup-compatibility/2006" xmlns:m="http://schemas.openxmlformats.org/officeDocument/2006/math" xmlns:cx="http://schemas.microsoft.com/office/drawing/2014/chartex" xmlns:c="http://schemas.openxmlformats.org/drawingml/2006/chart" xmlns:a14="http://schemas.microsoft.com/office/drawing/2010/main" xmlns="" encoding="base64url">eyJ2aWV3Qm94IjpbNDcsMV0sInBvaW50cyI6IjAsMCA0NywwIn0</pptd:line>
               </p:ext>
             </p:extLst>
           </p:nvPr>
@@ -22339,7 +22344,7 @@
           <p:nvPr>
             <p:extLst>
               <p:ext uri="{F5677B7D-0D2A-4D9B-9A5C-6D8D7D0E5A5D}">
-                <pptd:line xmlns="" xmlns:a14="http://schemas.microsoft.com/office/drawing/2010/main" xmlns:c="http://schemas.openxmlformats.org/drawingml/2006/chart" xmlns:cx="http://schemas.microsoft.com/office/drawing/2014/chartex" xmlns:m="http://schemas.openxmlformats.org/officeDocument/2006/math" xmlns:mc="http://schemas.openxmlformats.org/markup-compatibility/2006" xmlns:pptd="https://kimi-design.msh.team/pptd/2026" encoding="base64url">eyJ2aWV3Qm94IjpbMSwxNDNdLCJwb2ludHMiOiIwLDAgMCwxNDMifQ</pptd:line>
+                <pptd:line xmlns:pptd="https://kimi-design.msh.team/pptd/2026" xmlns:mc="http://schemas.openxmlformats.org/markup-compatibility/2006" xmlns:m="http://schemas.openxmlformats.org/officeDocument/2006/math" xmlns:cx="http://schemas.microsoft.com/office/drawing/2014/chartex" xmlns:c="http://schemas.openxmlformats.org/drawingml/2006/chart" xmlns:a14="http://schemas.microsoft.com/office/drawing/2010/main" xmlns="" encoding="base64url">eyJ2aWV3Qm94IjpbMSwxNDNdLCJwb2ludHMiOiIwLDAgMCwxNDMifQ</pptd:line>
               </p:ext>
             </p:extLst>
           </p:nvPr>
@@ -22849,7 +22854,7 @@
               </a:lnSpc>
             </a:pPr>
             <a:r>
-              <a:rPr lang="en-US" sz="2800" b="1" noProof="1">
+              <a:rPr lang="en-US" sz="2600" b="1" noProof="1">
                 <a:solidFill>
                   <a:srgbClr val="172526"/>
                 </a:solidFill>
@@ -22859,7 +22864,7 @@
               <a:t>Камера выявляет дефект, а толкатель удаляет лоток:
 линия продолжает работать без остановки</a:t>
             </a:r>
-            <a:endParaRPr lang="en-US" sz="2800" noProof="1"/>
+            <a:endParaRPr lang="en-US" sz="2600" noProof="1"/>
           </a:p>
         </p:txBody>
       </p:sp>
@@ -22976,7 +22981,7 @@
           <p:nvPr>
             <p:extLst>
               <p:ext uri="{F5677B7D-0D2A-4D9B-9A5C-6D8D7D0E5A5D}">
-                <pptd:line xmlns:pptd="https://kimi-design.msh.team/pptd/2026" xmlns:mc="http://schemas.openxmlformats.org/markup-compatibility/2006" xmlns:m="http://schemas.openxmlformats.org/officeDocument/2006/math" xmlns:cx="http://schemas.microsoft.com/office/drawing/2014/chartex" xmlns:c="http://schemas.openxmlformats.org/drawingml/2006/chart" xmlns:a14="http://schemas.microsoft.com/office/drawing/2010/main" xmlns="" encoding="base64url">eyJ2aWV3Qm94IjpbMSw0N10sInBvaW50cyI6IjAsMCAwLDQ3In0</pptd:line>
+                <pptd:line xmlns="" xmlns:a14="http://schemas.microsoft.com/office/drawing/2010/main" xmlns:c="http://schemas.openxmlformats.org/drawingml/2006/chart" xmlns:cx="http://schemas.microsoft.com/office/drawing/2014/chartex" xmlns:m="http://schemas.openxmlformats.org/officeDocument/2006/math" xmlns:mc="http://schemas.openxmlformats.org/markup-compatibility/2006" xmlns:pptd="https://kimi-design.msh.team/pptd/2026" encoding="base64url">eyJ2aWV3Qm94IjpbMSw0N10sInBvaW50cyI6IjAsMCAwLDQ3In0</pptd:line>
               </p:ext>
             </p:extLst>
           </p:nvPr>
@@ -23103,7 +23108,7 @@
           <p:nvPr>
             <p:extLst>
               <p:ext uri="{F5677B7D-0D2A-4D9B-9A5C-6D8D7D0E5A5D}">
-                <pptd:line xmlns:pptd="https://kimi-design.msh.team/pptd/2026" xmlns:mc="http://schemas.openxmlformats.org/markup-compatibility/2006" xmlns:m="http://schemas.openxmlformats.org/officeDocument/2006/math" xmlns:cx="http://schemas.microsoft.com/office/drawing/2014/chartex" xmlns:c="http://schemas.openxmlformats.org/drawingml/2006/chart" xmlns:a14="http://schemas.microsoft.com/office/drawing/2010/main" xmlns="" encoding="base64url">eyJ2aWV3Qm94IjpbMSw0N10sInBvaW50cyI6IjAsMCAwLDQ3In0</pptd:line>
+                <pptd:line xmlns="" xmlns:a14="http://schemas.microsoft.com/office/drawing/2010/main" xmlns:c="http://schemas.openxmlformats.org/drawingml/2006/chart" xmlns:cx="http://schemas.microsoft.com/office/drawing/2014/chartex" xmlns:m="http://schemas.openxmlformats.org/officeDocument/2006/math" xmlns:mc="http://schemas.openxmlformats.org/markup-compatibility/2006" xmlns:pptd="https://kimi-design.msh.team/pptd/2026" encoding="base64url">eyJ2aWV3Qm94IjpbMSw0N10sInBvaW50cyI6IjAsMCAwLDQ3In0</pptd:line>
               </p:ext>
             </p:extLst>
           </p:nvPr>
@@ -23230,7 +23235,7 @@
           <p:nvPr>
             <p:extLst>
               <p:ext uri="{F5677B7D-0D2A-4D9B-9A5C-6D8D7D0E5A5D}">
-                <pptd:line xmlns:pptd="https://kimi-design.msh.team/pptd/2026" xmlns:mc="http://schemas.openxmlformats.org/markup-compatibility/2006" xmlns:m="http://schemas.openxmlformats.org/officeDocument/2006/math" xmlns:cx="http://schemas.microsoft.com/office/drawing/2014/chartex" xmlns:c="http://schemas.openxmlformats.org/drawingml/2006/chart" xmlns:a14="http://schemas.microsoft.com/office/drawing/2010/main" xmlns="" encoding="base64url">eyJ2aWV3Qm94IjpbMSw0N10sInBvaW50cyI6IjAsMCAwLDQ3In0</pptd:line>
+                <pptd:line xmlns="" xmlns:a14="http://schemas.microsoft.com/office/drawing/2010/main" xmlns:c="http://schemas.openxmlformats.org/drawingml/2006/chart" xmlns:cx="http://schemas.microsoft.com/office/drawing/2014/chartex" xmlns:m="http://schemas.openxmlformats.org/officeDocument/2006/math" xmlns:mc="http://schemas.openxmlformats.org/markup-compatibility/2006" xmlns:pptd="https://kimi-design.msh.team/pptd/2026" encoding="base64url">eyJ2aWV3Qm94IjpbMSw0N10sInBvaW50cyI6IjAsMCAwLDQ3In0</pptd:line>
               </p:ext>
             </p:extLst>
           </p:nvPr>
@@ -23399,7 +23404,7 @@
           <p:nvPr>
             <p:extLst>
               <p:ext uri="{F5677B7D-0D2A-4D9B-9A5C-6D8D7D0E5A5D}">
-                <pptd:icon xmlns:pptd="https://kimi-design.msh.team/pptd/2026" xmlns:mc="http://schemas.openxmlformats.org/markup-compatibility/2006" xmlns:m="http://schemas.openxmlformats.org/officeDocument/2006/math" xmlns:cx="http://schemas.microsoft.com/office/drawing/2014/chartex" xmlns:c="http://schemas.openxmlformats.org/drawingml/2006/chart" xmlns:a14="http://schemas.microsoft.com/office/drawing/2010/main" xmlns="" encoding="base64url">eyJpY29uTmFtZSI6ImZhczpjYW1lcmEifQ</pptd:icon>
+                <pptd:icon xmlns="" xmlns:a14="http://schemas.microsoft.com/office/drawing/2010/main" xmlns:c="http://schemas.openxmlformats.org/drawingml/2006/chart" xmlns:cx="http://schemas.microsoft.com/office/drawing/2014/chartex" xmlns:m="http://schemas.openxmlformats.org/officeDocument/2006/math" xmlns:mc="http://schemas.openxmlformats.org/markup-compatibility/2006" xmlns:pptd="https://kimi-design.msh.team/pptd/2026" encoding="base64url">eyJpY29uTmFtZSI6ImZhczpjYW1lcmEifQ</pptd:icon>
               </p:ext>
             </p:extLst>
           </p:nvPr>
@@ -23601,7 +23606,7 @@
           <p:nvPr>
             <p:extLst>
               <p:ext uri="{F5677B7D-0D2A-4D9B-9A5C-6D8D7D0E5A5D}">
-                <pptd:line xmlns:pptd="https://kimi-design.msh.team/pptd/2026" xmlns:mc="http://schemas.openxmlformats.org/markup-compatibility/2006" xmlns:m="http://schemas.openxmlformats.org/officeDocument/2006/math" xmlns:cx="http://schemas.microsoft.com/office/drawing/2014/chartex" xmlns:c="http://schemas.openxmlformats.org/drawingml/2006/chart" xmlns:a14="http://schemas.microsoft.com/office/drawing/2010/main" xmlns="" encoding="base64url">eyJ2aWV3Qm94IjpbNDIsMV0sInBvaW50cyI6IjAsMCA0MiwwIn0</pptd:line>
+                <pptd:line xmlns="" xmlns:a14="http://schemas.microsoft.com/office/drawing/2010/main" xmlns:c="http://schemas.openxmlformats.org/drawingml/2006/chart" xmlns:cx="http://schemas.microsoft.com/office/drawing/2014/chartex" xmlns:m="http://schemas.openxmlformats.org/officeDocument/2006/math" xmlns:mc="http://schemas.openxmlformats.org/markup-compatibility/2006" xmlns:pptd="https://kimi-design.msh.team/pptd/2026" encoding="base64url">eyJ2aWV3Qm94IjpbNDIsMV0sInBvaW50cyI6IjAsMCA0MiwwIn0</pptd:line>
               </p:ext>
             </p:extLst>
           </p:nvPr>
@@ -23645,7 +23650,7 @@
           <p:nvPr>
             <p:extLst>
               <p:ext uri="{F5677B7D-0D2A-4D9B-9A5C-6D8D7D0E5A5D}">
-                <pptd:icon xmlns:pptd="https://kimi-design.msh.team/pptd/2026" xmlns:mc="http://schemas.openxmlformats.org/markup-compatibility/2006" xmlns:m="http://schemas.openxmlformats.org/officeDocument/2006/math" xmlns:cx="http://schemas.microsoft.com/office/drawing/2014/chartex" xmlns:c="http://schemas.openxmlformats.org/drawingml/2006/chart" xmlns:a14="http://schemas.microsoft.com/office/drawing/2010/main" xmlns="" encoding="base64url">eyJpY29uTmFtZSI6ImZhczptaWNyb2NoaXAifQ</pptd:icon>
+                <pptd:icon xmlns="" xmlns:a14="http://schemas.microsoft.com/office/drawing/2010/main" xmlns:c="http://schemas.openxmlformats.org/drawingml/2006/chart" xmlns:cx="http://schemas.microsoft.com/office/drawing/2014/chartex" xmlns:m="http://schemas.openxmlformats.org/officeDocument/2006/math" xmlns:mc="http://schemas.openxmlformats.org/markup-compatibility/2006" xmlns:pptd="https://kimi-design.msh.team/pptd/2026" encoding="base64url">eyJpY29uTmFtZSI6ImZhczptaWNyb2NoaXAifQ</pptd:icon>
               </p:ext>
             </p:extLst>
           </p:nvPr>
@@ -24059,7 +24064,7 @@
           <p:nvPr>
             <p:extLst>
               <p:ext uri="{F5677B7D-0D2A-4D9B-9A5C-6D8D7D0E5A5D}">
-                <pptd:line xmlns:pptd="https://kimi-design.msh.team/pptd/2026" xmlns:mc="http://schemas.openxmlformats.org/markup-compatibility/2006" xmlns:m="http://schemas.openxmlformats.org/officeDocument/2006/math" xmlns:cx="http://schemas.microsoft.com/office/drawing/2014/chartex" xmlns:c="http://schemas.openxmlformats.org/drawingml/2006/chart" xmlns:a14="http://schemas.microsoft.com/office/drawing/2010/main" xmlns="" encoding="base64url">eyJ2aWV3Qm94IjpbNDIsMV0sInBvaW50cyI6IjAsMCA0MiwwIn0</pptd:line>
+                <pptd:line xmlns="" xmlns:a14="http://schemas.microsoft.com/office/drawing/2010/main" xmlns:c="http://schemas.openxmlformats.org/drawingml/2006/chart" xmlns:cx="http://schemas.microsoft.com/office/drawing/2014/chartex" xmlns:m="http://schemas.openxmlformats.org/officeDocument/2006/math" xmlns:mc="http://schemas.openxmlformats.org/markup-compatibility/2006" xmlns:pptd="https://kimi-design.msh.team/pptd/2026" encoding="base64url">eyJ2aWV3Qm94IjpbNDIsMV0sInBvaW50cyI6IjAsMCA0MiwwIn0</pptd:line>
               </p:ext>
             </p:extLst>
           </p:nvPr>
@@ -24103,7 +24108,7 @@
           <p:nvPr>
             <p:extLst>
               <p:ext uri="{F5677B7D-0D2A-4D9B-9A5C-6D8D7D0E5A5D}">
-                <pptd:icon xmlns:pptd="https://kimi-design.msh.team/pptd/2026" xmlns:mc="http://schemas.openxmlformats.org/markup-compatibility/2006" xmlns:m="http://schemas.openxmlformats.org/officeDocument/2006/math" xmlns:cx="http://schemas.microsoft.com/office/drawing/2014/chartex" xmlns:c="http://schemas.openxmlformats.org/drawingml/2006/chart" xmlns:a14="http://schemas.microsoft.com/office/drawing/2010/main" xmlns="" encoding="base64url">eyJpY29uTmFtZSI6ImZhczpnZWFycyJ9</pptd:icon>
+                <pptd:icon xmlns="" xmlns:a14="http://schemas.microsoft.com/office/drawing/2010/main" xmlns:c="http://schemas.openxmlformats.org/drawingml/2006/chart" xmlns:cx="http://schemas.microsoft.com/office/drawing/2014/chartex" xmlns:m="http://schemas.openxmlformats.org/officeDocument/2006/math" xmlns:mc="http://schemas.openxmlformats.org/markup-compatibility/2006" xmlns:pptd="https://kimi-design.msh.team/pptd/2026" encoding="base64url">eyJpY29uTmFtZSI6ImZhczpnZWFycyJ9</pptd:icon>
               </p:ext>
             </p:extLst>
           </p:nvPr>
@@ -24589,7 +24594,7 @@
           <p:nvPr>
             <p:extLst>
               <p:ext uri="{F5677B7D-0D2A-4D9B-9A5C-6D8D7D0E5A5D}">
-                <pptd:line xmlns:pptd="https://kimi-design.msh.team/pptd/2026" xmlns:mc="http://schemas.openxmlformats.org/markup-compatibility/2006" xmlns:m="http://schemas.openxmlformats.org/officeDocument/2006/math" xmlns:cx="http://schemas.microsoft.com/office/drawing/2014/chartex" xmlns:c="http://schemas.openxmlformats.org/drawingml/2006/chart" xmlns:a14="http://schemas.microsoft.com/office/drawing/2010/main" xmlns="" encoding="base64url">eyJ2aWV3Qm94IjpbNDIsMV0sInBvaW50cyI6IjAsMCA0MiwwIn0</pptd:line>
+                <pptd:line xmlns="" xmlns:a14="http://schemas.microsoft.com/office/drawing/2010/main" xmlns:c="http://schemas.openxmlformats.org/drawingml/2006/chart" xmlns:cx="http://schemas.microsoft.com/office/drawing/2014/chartex" xmlns:m="http://schemas.openxmlformats.org/officeDocument/2006/math" xmlns:mc="http://schemas.openxmlformats.org/markup-compatibility/2006" xmlns:pptd="https://kimi-design.msh.team/pptd/2026" encoding="base64url">eyJ2aWV3Qm94IjpbNDIsMV0sInBvaW50cyI6IjAsMCA0MiwwIn0</pptd:line>
               </p:ext>
             </p:extLst>
           </p:nvPr>
@@ -24633,7 +24638,7 @@
           <p:nvPr>
             <p:extLst>
               <p:ext uri="{F5677B7D-0D2A-4D9B-9A5C-6D8D7D0E5A5D}">
-                <pptd:icon xmlns:pptd="https://kimi-design.msh.team/pptd/2026" xmlns:mc="http://schemas.openxmlformats.org/markup-compatibility/2006" xmlns:m="http://schemas.openxmlformats.org/officeDocument/2006/math" xmlns:cx="http://schemas.microsoft.com/office/drawing/2014/chartex" xmlns:c="http://schemas.openxmlformats.org/drawingml/2006/chart" xmlns:a14="http://schemas.microsoft.com/office/drawing/2010/main" xmlns="" encoding="base64url">eyJpY29uTmFtZSI6ImZhczpjaXJjbGUtY2hlY2sifQ</pptd:icon>
+                <pptd:icon xmlns="" xmlns:a14="http://schemas.microsoft.com/office/drawing/2010/main" xmlns:c="http://schemas.openxmlformats.org/drawingml/2006/chart" xmlns:cx="http://schemas.microsoft.com/office/drawing/2014/chartex" xmlns:m="http://schemas.openxmlformats.org/officeDocument/2006/math" xmlns:mc="http://schemas.openxmlformats.org/markup-compatibility/2006" xmlns:pptd="https://kimi-design.msh.team/pptd/2026" encoding="base64url">eyJpY29uTmFtZSI6ImZhczpjaXJjbGUtY2hlY2sifQ</pptd:icon>
               </p:ext>
             </p:extLst>
           </p:nvPr>
@@ -24823,7 +24828,7 @@
           <p:nvPr>
             <p:extLst>
               <p:ext uri="{F5677B7D-0D2A-4D9B-9A5C-6D8D7D0E5A5D}">
-                <pptd:line xmlns:pptd="https://kimi-design.msh.team/pptd/2026" xmlns:mc="http://schemas.openxmlformats.org/markup-compatibility/2006" xmlns:m="http://schemas.openxmlformats.org/officeDocument/2006/math" xmlns:cx="http://schemas.microsoft.com/office/drawing/2014/chartex" xmlns:c="http://schemas.openxmlformats.org/drawingml/2006/chart" xmlns:a14="http://schemas.microsoft.com/office/drawing/2010/main" xmlns="" encoding="base64url">eyJ2aWV3Qm94IjpbNDIsMV0sInBvaW50cyI6IjAsMCA0MiwwIn0</pptd:line>
+                <pptd:line xmlns="" xmlns:a14="http://schemas.microsoft.com/office/drawing/2010/main" xmlns:c="http://schemas.openxmlformats.org/drawingml/2006/chart" xmlns:cx="http://schemas.microsoft.com/office/drawing/2014/chartex" xmlns:m="http://schemas.openxmlformats.org/officeDocument/2006/math" xmlns:mc="http://schemas.openxmlformats.org/markup-compatibility/2006" xmlns:pptd="https://kimi-design.msh.team/pptd/2026" encoding="base64url">eyJ2aWV3Qm94IjpbNDIsMV0sInBvaW50cyI6IjAsMCA0MiwwIn0</pptd:line>
               </p:ext>
             </p:extLst>
           </p:nvPr>
@@ -24867,7 +24872,7 @@
           <p:nvPr>
             <p:extLst>
               <p:ext uri="{F5677B7D-0D2A-4D9B-9A5C-6D8D7D0E5A5D}">
-                <pptd:icon xmlns:pptd="https://kimi-design.msh.team/pptd/2026" xmlns:mc="http://schemas.openxmlformats.org/markup-compatibility/2006" xmlns:m="http://schemas.openxmlformats.org/officeDocument/2006/math" xmlns:cx="http://schemas.microsoft.com/office/drawing/2014/chartex" xmlns:c="http://schemas.openxmlformats.org/drawingml/2006/chart" xmlns:a14="http://schemas.microsoft.com/office/drawing/2010/main" xmlns="" encoding="base64url">eyJpY29uTmFtZSI6ImZhczpkYXRhYmFzZSJ9</pptd:icon>
+                <pptd:icon xmlns="" xmlns:a14="http://schemas.microsoft.com/office/drawing/2010/main" xmlns:c="http://schemas.openxmlformats.org/drawingml/2006/chart" xmlns:cx="http://schemas.microsoft.com/office/drawing/2014/chartex" xmlns:m="http://schemas.openxmlformats.org/officeDocument/2006/math" xmlns:mc="http://schemas.openxmlformats.org/markup-compatibility/2006" xmlns:pptd="https://kimi-design.msh.team/pptd/2026" encoding="base64url">eyJpY29uTmFtZSI6ImZhczpkYXRhYmFzZSJ9</pptd:icon>
               </p:ext>
             </p:extLst>
           </p:nvPr>
@@ -25502,7 +25507,7 @@
               </a:lnSpc>
             </a:pPr>
             <a:r>
-              <a:rPr lang="en-US" sz="2800" b="1" noProof="1">
+              <a:rPr lang="en-US" sz="2600" b="1" noProof="1">
                 <a:solidFill>
                   <a:srgbClr val="172526"/>
                 </a:solidFill>
@@ -25511,7 +25516,7 @@
               </a:rPr>
               <a:t>Надёжная модель начинается с производственных данных и независимого теста - не с общей точности</a:t>
             </a:r>
-            <a:endParaRPr lang="en-US" sz="2800" noProof="1"/>
+            <a:endParaRPr lang="en-US" sz="2600" noProof="1"/>
           </a:p>
         </p:txBody>
       </p:sp>
@@ -26058,7 +26063,7 @@
           <p:nvPr>
             <p:extLst>
               <p:ext uri="{F5677B7D-0D2A-4D9B-9A5C-6D8D7D0E5A5D}">
-                <pptd:line xmlns:pptd="https://kimi-design.msh.team/pptd/2026" xmlns:mc="http://schemas.openxmlformats.org/markup-compatibility/2006" xmlns:m="http://schemas.openxmlformats.org/officeDocument/2006/math" xmlns:cx="http://schemas.microsoft.com/office/drawing/2014/chartex" xmlns:c="http://schemas.openxmlformats.org/drawingml/2006/chart" xmlns:a14="http://schemas.microsoft.com/office/drawing/2010/main" xmlns="" encoding="base64url">eyJ2aWV3Qm94IjpbMSwzMjRdLCJwb2ludHMiOiIwLDAgMCwzMjQifQ</pptd:line>
+                <pptd:line xmlns="" xmlns:a14="http://schemas.microsoft.com/office/drawing/2010/main" xmlns:c="http://schemas.openxmlformats.org/drawingml/2006/chart" xmlns:cx="http://schemas.microsoft.com/office/drawing/2014/chartex" xmlns:m="http://schemas.openxmlformats.org/officeDocument/2006/math" xmlns:mc="http://schemas.openxmlformats.org/markup-compatibility/2006" xmlns:pptd="https://kimi-design.msh.team/pptd/2026" encoding="base64url">eyJ2aWV3Qm94IjpbMSwzMjRdLCJwb2ludHMiOiIwLDAgMCwzMjQifQ</pptd:line>
               </p:ext>
             </p:extLst>
           </p:nvPr>
@@ -27126,7 +27131,7 @@
           <p:nvPr>
             <p:extLst>
               <p:ext uri="{F5677B7D-0D2A-4D9B-9A5C-6D8D7D0E5A5D}">
-                <pptd:line xmlns:pptd="https://kimi-design.msh.team/pptd/2026" xmlns:mc="http://schemas.openxmlformats.org/markup-compatibility/2006" xmlns:m="http://schemas.openxmlformats.org/officeDocument/2006/math" xmlns:cx="http://schemas.microsoft.com/office/drawing/2014/chartex" xmlns:c="http://schemas.openxmlformats.org/drawingml/2006/chart" xmlns:a14="http://schemas.microsoft.com/office/drawing/2010/main" xmlns="" encoding="base64url">eyJ2aWV3Qm94IjpbMSwzNTRdLCJwb2ludHMiOiIwLDAgMCwzNTQifQ</pptd:line>
+                <pptd:line xmlns="" xmlns:a14="http://schemas.microsoft.com/office/drawing/2010/main" xmlns:c="http://schemas.openxmlformats.org/drawingml/2006/chart" xmlns:cx="http://schemas.microsoft.com/office/drawing/2014/chartex" xmlns:m="http://schemas.openxmlformats.org/officeDocument/2006/math" xmlns:mc="http://schemas.openxmlformats.org/markup-compatibility/2006" xmlns:pptd="https://kimi-design.msh.team/pptd/2026" encoding="base64url">eyJ2aWV3Qm94IjpbMSwzNTRdLCJwb2ludHMiOiIwLDAgMCwzNTQifQ</pptd:line>
               </p:ext>
             </p:extLst>
           </p:nvPr>
